--- a/Grammar_Mastery/05_Adverbs/GM-ADV-01_Adverbs_of_Time_Place_Manner.pptx
+++ b/Grammar_Mastery/05_Adverbs/GM-ADV-01_Adverbs_of_Time_Place_Manner.pptx
@@ -531,7 +531,11 @@
           <a:lstStyle/>
           <a:p>
             <a:r>
-              <a:rPr lang="en-US" dirty="0"/>
+              <a:rPr lang="ar-SA" dirty="0">
+                <a:latin typeface="Amiri" pitchFamily="2" charset="-78"/>
+                <a:ea typeface="Amiri" pitchFamily="2" charset="-78"/>
+                <a:cs typeface="Amiri" pitchFamily="2" charset="-78"/>
+              </a:rPr>
               <a:t>LESSON AT A GLANCE — planned for 56 minutes, leaving about 4 minutes for Teams delays.
 0–1 Welcome · 1–2 Lesson map · 2–9 Do Now + answers · 9–10 Objectives · 10–13 Grammar words · 13–24 The grammar, step by step · 24–26 Quick check · 26–29 I Do · 29–38 We Do (sort, repair, practise) · 38–49 You Do (read, speak, write on your route) · 49–54 Feedback (model, self-check, exit ticket) · 54–56 Preparation.
 FLEX slides are optional: use them if the class is moving quickly; otherwise the same activities are on the website for homework.
@@ -897,7 +901,11 @@
           <a:lstStyle/>
           <a:p>
             <a:r>
-              <a:rPr lang="en-US" dirty="0"/>
+              <a:rPr lang="ar-SA" dirty="0">
+                <a:latin typeface="Amiri" pitchFamily="2" charset="-78"/>
+                <a:ea typeface="Amiri" pitchFamily="2" charset="-78"/>
+                <a:cs typeface="Amiri" pitchFamily="2" charset="-78"/>
+              </a:rPr>
               <a:t>I DO (3 min) — think aloud at every step: name the rule in English and Arabic as you apply it.
 Start with the bare verb and keep asking متى؟ أين؟ كيف؟ — each answer adds an adverb. Note مَسَاءً (in the evening) ends in -an like many time adverbs.</a:t>
             </a:r>
@@ -1521,7 +1529,11 @@
           <a:lstStyle/>
           <a:p>
             <a:r>
-              <a:rPr lang="en-US" dirty="0"/>
+              <a:rPr lang="ar-SA" dirty="0">
+                <a:latin typeface="Amiri" pitchFamily="2" charset="-78"/>
+                <a:ea typeface="Amiri" pitchFamily="2" charset="-78"/>
+                <a:cs typeface="Amiri" pitchFamily="2" charset="-78"/>
+              </a:rPr>
               <a:t>WELCOME (1 min) — while students join.
 • Greet each student by name as they arrive: السَّلَامُ عَلَيْكُمْ. Take the register (Pastoral Tracker: attendance 0/1).
 • 2-MINUTE CHECK-IN (SEND training): a private chat to any student who seemed unsettled last lesson — “Are you okay today? 👍 / 👎”.
@@ -3317,7 +3329,11 @@
           <a:lstStyle/>
           <a:p>
             <a:r>
-              <a:rPr lang="en-US" dirty="0"/>
+              <a:rPr lang="ar-SA" dirty="0">
+                <a:latin typeface="Amiri" pitchFamily="2" charset="-78"/>
+                <a:ea typeface="Amiri" pitchFamily="2" charset="-78"/>
+                <a:cs typeface="Amiri" pitchFamily="2" charset="-78"/>
+              </a:rPr>
               <a:t>PART 1 (3 min) — website table “Adverbs of time”. Show the website pair: غَدًا سَأَذْهَبُ إِلَى السُّوقِ · سَأَذْهَبُ إِلَى السُّوقِ غَدًا.</a:t>
             </a:r>
             <a:endParaRPr lang="en-US" dirty="0"/>
@@ -3889,6 +3905,7 @@
                   <a:srgbClr val="D4AF37"/>
                 </a:solidFill>
                 <a:latin typeface="Amiri" pitchFamily="2" charset="-78"/>
+                <a:ea typeface="Amiri" pitchFamily="2" charset="-78"/>
                 <a:cs typeface="Amiri" pitchFamily="2" charset="-78"/>
               </a:rPr>
               <a:t>م</a:t>
@@ -4095,6 +4112,7 @@
                   <a:srgbClr val="D4AF37"/>
                 </a:solidFill>
                 <a:latin typeface="Amiri" pitchFamily="2" charset="-78"/>
+                <a:ea typeface="Amiri" pitchFamily="2" charset="-78"/>
                 <a:cs typeface="Amiri" pitchFamily="2" charset="-78"/>
               </a:rPr>
               <a:t>ظُرُوفُ الزَّمَانِ وَالْمَكَانِ وَالْحَالِ</a:t>
@@ -4552,6 +4570,7 @@
                   <a:srgbClr val="D4AF37"/>
                 </a:solidFill>
                 <a:latin typeface="Amiri" pitchFamily="2" charset="-78"/>
+                <a:ea typeface="Amiri" pitchFamily="2" charset="-78"/>
                 <a:cs typeface="Amiri" pitchFamily="2" charset="-78"/>
               </a:rPr>
               <a:t>م</a:t>
@@ -4872,6 +4891,7 @@
                   <a:srgbClr val="8A6D1E"/>
                 </a:solidFill>
                 <a:latin typeface="Amiri" pitchFamily="2" charset="-78"/>
+                <a:ea typeface="Amiri" pitchFamily="2" charset="-78"/>
                 <a:cs typeface="Amiri" pitchFamily="2" charset="-78"/>
               </a:rPr>
               <a:t>كَيْفَ يَحْدُثُ الْفِعْلُ؟</a:t>
@@ -5152,6 +5172,7 @@
                   <a:srgbClr val="1B3B6F"/>
                 </a:solidFill>
                 <a:latin typeface="Amiri" pitchFamily="2" charset="-78"/>
+                <a:ea typeface="Amiri" pitchFamily="2" charset="-78"/>
                 <a:cs typeface="Amiri" pitchFamily="2" charset="-78"/>
               </a:rPr>
               <a:t>جَيِّدًا · سَرِيعًا · فَجْأَةً · مَعًا</a:t>
@@ -5358,6 +5379,7 @@
                   <a:srgbClr val="1B3B6F"/>
                 </a:solidFill>
                 <a:latin typeface="Amiri" pitchFamily="2" charset="-78"/>
+                <a:ea typeface="Amiri" pitchFamily="2" charset="-78"/>
                 <a:cs typeface="Amiri" pitchFamily="2" charset="-78"/>
               </a:rPr>
               <a:t>بِبُطْءٍ · بِهُدُوءٍ · بِوُضُوحٍ · بِعِنَايَةٍ</a:t>
@@ -5499,6 +5521,7 @@
                   <a:srgbClr val="1B3B6F"/>
                 </a:solidFill>
                 <a:latin typeface="Amiri" pitchFamily="2" charset="-78"/>
+                <a:ea typeface="Amiri" pitchFamily="2" charset="-78"/>
                 <a:cs typeface="Amiri" pitchFamily="2" charset="-78"/>
               </a:rPr>
               <a:t>وَحْدَهُ · وَحْدَهَا</a:t>
@@ -5640,6 +5663,7 @@
                   <a:srgbClr val="1B3B6F"/>
                 </a:solidFill>
                 <a:latin typeface="Amiri" pitchFamily="2" charset="-78"/>
+                <a:ea typeface="Amiri" pitchFamily="2" charset="-78"/>
                 <a:cs typeface="Amiri" pitchFamily="2" charset="-78"/>
               </a:rPr>
               <a:t>سَيَّارَةٌ سَرِيعَةٌ</a:t>
@@ -5846,6 +5870,7 @@
                   <a:srgbClr val="1B3B6F"/>
                 </a:solidFill>
                 <a:latin typeface="Amiri" pitchFamily="2" charset="-78"/>
+                <a:ea typeface="Amiri" pitchFamily="2" charset="-78"/>
                 <a:cs typeface="Amiri" pitchFamily="2" charset="-78"/>
               </a:rPr>
               <a:t>تَسِيرُ السَّيَّارَةُ سَرِيعًا.</a:t>
@@ -6120,6 +6145,7 @@
                   <a:srgbClr val="D4AF37"/>
                 </a:solidFill>
                 <a:latin typeface="Amiri" pitchFamily="2" charset="-78"/>
+                <a:ea typeface="Amiri" pitchFamily="2" charset="-78"/>
                 <a:cs typeface="Amiri" pitchFamily="2" charset="-78"/>
               </a:rPr>
               <a:t>م</a:t>
@@ -6440,6 +6466,7 @@
                   <a:srgbClr val="8A6D1E"/>
                 </a:solidFill>
                 <a:latin typeface="Amiri" pitchFamily="2" charset="-78"/>
+                <a:ea typeface="Amiri" pitchFamily="2" charset="-78"/>
                 <a:cs typeface="Amiri" pitchFamily="2" charset="-78"/>
               </a:rPr>
               <a:t>فَحْصٌ سَرِيعٌ</a:t>
@@ -6714,6 +6741,7 @@
                   <a:srgbClr val="1F2A37"/>
                 </a:solidFill>
                 <a:latin typeface="Amiri" pitchFamily="2" charset="-78"/>
+                <a:ea typeface="Amiri" pitchFamily="2" charset="-78"/>
                 <a:cs typeface="Amiri" pitchFamily="2" charset="-78"/>
               </a:rPr>
               <a:t>دَرَسْتُ غَدًا.</a:t>
@@ -6815,6 +6843,7 @@
                   <a:srgbClr val="1F2A37"/>
                 </a:solidFill>
                 <a:latin typeface="Amiri" pitchFamily="2" charset="-78"/>
+                <a:ea typeface="Amiri" pitchFamily="2" charset="-78"/>
                 <a:cs typeface="Amiri" pitchFamily="2" charset="-78"/>
               </a:rPr>
               <a:t>سَأَدْرُسُ أَمْسِ.</a:t>
@@ -6916,6 +6945,7 @@
                   <a:srgbClr val="1F2A37"/>
                 </a:solidFill>
                 <a:latin typeface="Amiri" pitchFamily="2" charset="-78"/>
+                <a:ea typeface="Amiri" pitchFamily="2" charset="-78"/>
                 <a:cs typeface="Amiri" pitchFamily="2" charset="-78"/>
               </a:rPr>
               <a:t>أَدْرُسُ الآنَ.</a:t>
@@ -7152,6 +7182,7 @@
                   <a:srgbClr val="1F2A37"/>
                 </a:solidFill>
                 <a:latin typeface="Amiri" pitchFamily="2" charset="-78"/>
+                <a:ea typeface="Amiri" pitchFamily="2" charset="-78"/>
                 <a:cs typeface="Amiri" pitchFamily="2" charset="-78"/>
               </a:rPr>
               <a:t>سَافَرْنَا أَمْسِ.</a:t>
@@ -7253,6 +7284,7 @@
                   <a:srgbClr val="1F2A37"/>
                 </a:solidFill>
                 <a:latin typeface="Amiri" pitchFamily="2" charset="-78"/>
+                <a:ea typeface="Amiri" pitchFamily="2" charset="-78"/>
                 <a:cs typeface="Amiri" pitchFamily="2" charset="-78"/>
               </a:rPr>
               <a:t>سَنُسَافِرُ أَمْسِ.</a:t>
@@ -7354,6 +7386,7 @@
                   <a:srgbClr val="1F2A37"/>
                 </a:solidFill>
                 <a:latin typeface="Amiri" pitchFamily="2" charset="-78"/>
+                <a:ea typeface="Amiri" pitchFamily="2" charset="-78"/>
                 <a:cs typeface="Amiri" pitchFamily="2" charset="-78"/>
               </a:rPr>
               <a:t>نُسَافِرُ غَدًا.</a:t>
@@ -7527,6 +7560,7 @@
                   <a:srgbClr val="1F2A37"/>
                 </a:solidFill>
                 <a:latin typeface="Amiri" pitchFamily="2" charset="-78"/>
+                <a:ea typeface="Amiri" pitchFamily="2" charset="-78"/>
                 <a:cs typeface="Amiri" pitchFamily="2" charset="-78"/>
               </a:rPr>
               <a:t>الْحَقِيبَةُ ___ الْكُرْسِيِّ.</a:t>
@@ -7628,6 +7662,7 @@
                   <a:srgbClr val="1F2A37"/>
                 </a:solidFill>
                 <a:latin typeface="Amiri" pitchFamily="2" charset="-78"/>
+                <a:ea typeface="Amiri" pitchFamily="2" charset="-78"/>
                 <a:cs typeface="Amiri" pitchFamily="2" charset="-78"/>
               </a:rPr>
               <a:t>أَمْسِ</a:t>
@@ -7729,6 +7764,7 @@
                   <a:srgbClr val="1F2A37"/>
                 </a:solidFill>
                 <a:latin typeface="Amiri" pitchFamily="2" charset="-78"/>
+                <a:ea typeface="Amiri" pitchFamily="2" charset="-78"/>
                 <a:cs typeface="Amiri" pitchFamily="2" charset="-78"/>
               </a:rPr>
               <a:t>تَحْتَ</a:t>
@@ -7830,6 +7866,7 @@
                   <a:srgbClr val="1F2A37"/>
                 </a:solidFill>
                 <a:latin typeface="Amiri" pitchFamily="2" charset="-78"/>
+                <a:ea typeface="Amiri" pitchFamily="2" charset="-78"/>
                 <a:cs typeface="Amiri" pitchFamily="2" charset="-78"/>
               </a:rPr>
               <a:t>سَرِيعًا</a:t>
@@ -8066,6 +8103,7 @@
                   <a:srgbClr val="1F2A37"/>
                 </a:solidFill>
                 <a:latin typeface="Amiri" pitchFamily="2" charset="-78"/>
+                <a:ea typeface="Amiri" pitchFamily="2" charset="-78"/>
                 <a:cs typeface="Amiri" pitchFamily="2" charset="-78"/>
               </a:rPr>
               <a:t>تَقْرَأُ جَيِّدًا.</a:t>
@@ -8167,6 +8205,7 @@
                   <a:srgbClr val="1F2A37"/>
                 </a:solidFill>
                 <a:latin typeface="Amiri" pitchFamily="2" charset="-78"/>
+                <a:ea typeface="Amiri" pitchFamily="2" charset="-78"/>
                 <a:cs typeface="Amiri" pitchFamily="2" charset="-78"/>
               </a:rPr>
               <a:t>هِيَ قَارِئَةٌ جَيِّدَةٌ.</a:t>
@@ -8268,6 +8307,7 @@
                   <a:srgbClr val="1F2A37"/>
                 </a:solidFill>
                 <a:latin typeface="Amiri" pitchFamily="2" charset="-78"/>
+                <a:ea typeface="Amiri" pitchFamily="2" charset="-78"/>
                 <a:cs typeface="Amiri" pitchFamily="2" charset="-78"/>
               </a:rPr>
               <a:t>تَقْرَأُ جَيِّدَةٌ.</a:t>
@@ -8401,6 +8441,7 @@
                   <a:srgbClr val="D4AF37"/>
                 </a:solidFill>
                 <a:latin typeface="Amiri" pitchFamily="2" charset="-78"/>
+                <a:ea typeface="Amiri" pitchFamily="2" charset="-78"/>
                 <a:cs typeface="Amiri" pitchFamily="2" charset="-78"/>
               </a:rPr>
               <a:t>م</a:t>
@@ -8721,6 +8762,7 @@
                   <a:srgbClr val="8A6D1E"/>
                 </a:solidFill>
                 <a:latin typeface="Amiri" pitchFamily="2" charset="-78"/>
+                <a:ea typeface="Amiri" pitchFamily="2" charset="-78"/>
                 <a:cs typeface="Amiri" pitchFamily="2" charset="-78"/>
               </a:rPr>
               <a:t>الإِجَابَاتُ وَالتَّعْلِيلُ</a:t>
@@ -8995,6 +9037,7 @@
                   <a:srgbClr val="9AA1AB"/>
                 </a:solidFill>
                 <a:latin typeface="Amiri" pitchFamily="2" charset="-78"/>
+                <a:ea typeface="Amiri" pitchFamily="2" charset="-78"/>
                 <a:cs typeface="Amiri" pitchFamily="2" charset="-78"/>
               </a:rPr>
               <a:t>دَرَسْتُ غَدًا.</a:t>
@@ -9096,6 +9139,7 @@
                   <a:srgbClr val="9AA1AB"/>
                 </a:solidFill>
                 <a:latin typeface="Amiri" pitchFamily="2" charset="-78"/>
+                <a:ea typeface="Amiri" pitchFamily="2" charset="-78"/>
                 <a:cs typeface="Amiri" pitchFamily="2" charset="-78"/>
               </a:rPr>
               <a:t>سَأَدْرُسُ أَمْسِ.</a:t>
@@ -9224,6 +9268,7 @@
                   <a:srgbClr val="1F2A37"/>
                 </a:solidFill>
                 <a:latin typeface="Amiri" pitchFamily="2" charset="-78"/>
+                <a:ea typeface="Amiri" pitchFamily="2" charset="-78"/>
                 <a:cs typeface="Amiri" pitchFamily="2" charset="-78"/>
               </a:rPr>
               <a:t>أَدْرُسُ الآنَ.</a:t>
@@ -9525,6 +9570,7 @@
                   <a:srgbClr val="1F2A37"/>
                 </a:solidFill>
                 <a:latin typeface="Amiri" pitchFamily="2" charset="-78"/>
+                <a:ea typeface="Amiri" pitchFamily="2" charset="-78"/>
                 <a:cs typeface="Amiri" pitchFamily="2" charset="-78"/>
               </a:rPr>
               <a:t>سَافَرْنَا أَمْسِ.</a:t>
@@ -9626,6 +9672,7 @@
                   <a:srgbClr val="9AA1AB"/>
                 </a:solidFill>
                 <a:latin typeface="Amiri" pitchFamily="2" charset="-78"/>
+                <a:ea typeface="Amiri" pitchFamily="2" charset="-78"/>
                 <a:cs typeface="Amiri" pitchFamily="2" charset="-78"/>
               </a:rPr>
               <a:t>سَنُسَافِرُ أَمْسِ.</a:t>
@@ -9727,6 +9774,7 @@
                   <a:srgbClr val="9AA1AB"/>
                 </a:solidFill>
                 <a:latin typeface="Amiri" pitchFamily="2" charset="-78"/>
+                <a:ea typeface="Amiri" pitchFamily="2" charset="-78"/>
                 <a:cs typeface="Amiri" pitchFamily="2" charset="-78"/>
               </a:rPr>
               <a:t>نُسَافِرُ غَدًا.</a:t>
@@ -9938,6 +9986,7 @@
                   <a:srgbClr val="1F2A37"/>
                 </a:solidFill>
                 <a:latin typeface="Amiri" pitchFamily="2" charset="-78"/>
+                <a:ea typeface="Amiri" pitchFamily="2" charset="-78"/>
                 <a:cs typeface="Amiri" pitchFamily="2" charset="-78"/>
               </a:rPr>
               <a:t>الْحَقِيبَةُ ___ الْكُرْسِيِّ.</a:t>
@@ -10039,6 +10088,7 @@
                   <a:srgbClr val="9AA1AB"/>
                 </a:solidFill>
                 <a:latin typeface="Amiri" pitchFamily="2" charset="-78"/>
+                <a:ea typeface="Amiri" pitchFamily="2" charset="-78"/>
                 <a:cs typeface="Amiri" pitchFamily="2" charset="-78"/>
               </a:rPr>
               <a:t>أَمْسِ</a:t>
@@ -10167,6 +10217,7 @@
                   <a:srgbClr val="1F2A37"/>
                 </a:solidFill>
                 <a:latin typeface="Amiri" pitchFamily="2" charset="-78"/>
+                <a:ea typeface="Amiri" pitchFamily="2" charset="-78"/>
                 <a:cs typeface="Amiri" pitchFamily="2" charset="-78"/>
               </a:rPr>
               <a:t>تَحْتَ</a:t>
@@ -10268,6 +10319,7 @@
                   <a:srgbClr val="9AA1AB"/>
                 </a:solidFill>
                 <a:latin typeface="Amiri" pitchFamily="2" charset="-78"/>
+                <a:ea typeface="Amiri" pitchFamily="2" charset="-78"/>
                 <a:cs typeface="Amiri" pitchFamily="2" charset="-78"/>
               </a:rPr>
               <a:t>سَرِيعًا</a:t>
@@ -10569,6 +10621,7 @@
                   <a:srgbClr val="1F2A37"/>
                 </a:solidFill>
                 <a:latin typeface="Amiri" pitchFamily="2" charset="-78"/>
+                <a:ea typeface="Amiri" pitchFamily="2" charset="-78"/>
                 <a:cs typeface="Amiri" pitchFamily="2" charset="-78"/>
               </a:rPr>
               <a:t>تَقْرَأُ جَيِّدًا.</a:t>
@@ -10670,6 +10723,7 @@
                   <a:srgbClr val="9AA1AB"/>
                 </a:solidFill>
                 <a:latin typeface="Amiri" pitchFamily="2" charset="-78"/>
+                <a:ea typeface="Amiri" pitchFamily="2" charset="-78"/>
                 <a:cs typeface="Amiri" pitchFamily="2" charset="-78"/>
               </a:rPr>
               <a:t>هِيَ قَارِئَةٌ جَيِّدَةٌ.</a:t>
@@ -10771,6 +10825,7 @@
                   <a:srgbClr val="9AA1AB"/>
                 </a:solidFill>
                 <a:latin typeface="Amiri" pitchFamily="2" charset="-78"/>
+                <a:ea typeface="Amiri" pitchFamily="2" charset="-78"/>
                 <a:cs typeface="Amiri" pitchFamily="2" charset="-78"/>
               </a:rPr>
               <a:t>تَقْرَأُ جَيِّدَةٌ.</a:t>
@@ -10942,6 +10997,7 @@
                   <a:srgbClr val="D4AF37"/>
                 </a:solidFill>
                 <a:latin typeface="Amiri" pitchFamily="2" charset="-78"/>
+                <a:ea typeface="Amiri" pitchFamily="2" charset="-78"/>
                 <a:cs typeface="Amiri" pitchFamily="2" charset="-78"/>
               </a:rPr>
               <a:t>م</a:t>
@@ -11262,6 +11318,7 @@
                   <a:srgbClr val="8A6D1E"/>
                 </a:solidFill>
                 <a:latin typeface="Amiri" pitchFamily="2" charset="-78"/>
+                <a:ea typeface="Amiri" pitchFamily="2" charset="-78"/>
                 <a:cs typeface="Amiri" pitchFamily="2" charset="-78"/>
               </a:rPr>
               <a:t>شَاهِدْ ثُمَّ اُكْتُبْ</a:t>
@@ -11473,6 +11530,7 @@
                   <a:srgbClr val="1B3B6F"/>
                 </a:solidFill>
                 <a:latin typeface="Amiri" pitchFamily="2" charset="-78"/>
+                <a:ea typeface="Amiri" pitchFamily="2" charset="-78"/>
                 <a:cs typeface="Amiri" pitchFamily="2" charset="-78"/>
               </a:rPr>
               <a:t>أَدْرُسُ</a:t>
@@ -11722,6 +11780,7 @@
                   <a:srgbClr val="1B3B6F"/>
                 </a:solidFill>
                 <a:latin typeface="Amiri" pitchFamily="2" charset="-78"/>
+                <a:ea typeface="Amiri" pitchFamily="2" charset="-78"/>
                 <a:cs typeface="Amiri" pitchFamily="2" charset="-78"/>
               </a:rPr>
               <a:t>أَدْرُسُ مَسَاءً</a:t>
@@ -11971,6 +12030,7 @@
                   <a:srgbClr val="1B3B6F"/>
                 </a:solidFill>
                 <a:latin typeface="Amiri" pitchFamily="2" charset="-78"/>
+                <a:ea typeface="Amiri" pitchFamily="2" charset="-78"/>
                 <a:cs typeface="Amiri" pitchFamily="2" charset="-78"/>
               </a:rPr>
               <a:t>فِي غُرْفَتِي</a:t>
@@ -12220,6 +12280,7 @@
                   <a:srgbClr val="1B3B6F"/>
                 </a:solidFill>
                 <a:latin typeface="Amiri" pitchFamily="2" charset="-78"/>
+                <a:ea typeface="Amiri" pitchFamily="2" charset="-78"/>
                 <a:cs typeface="Amiri" pitchFamily="2" charset="-78"/>
               </a:rPr>
               <a:t>بِهُدُوءٍ</a:t>
@@ -12522,6 +12583,7 @@
                   <a:srgbClr val="0E7C86"/>
                 </a:solidFill>
                 <a:latin typeface="Amiri" pitchFamily="2" charset="-78"/>
+                <a:ea typeface="Amiri" pitchFamily="2" charset="-78"/>
                 <a:cs typeface="Amiri" pitchFamily="2" charset="-78"/>
               </a:rPr>
               <a:t>مَسَاءً</a:t>
@@ -12535,6 +12597,7 @@
                   <a:srgbClr val="1B3B6F"/>
                 </a:solidFill>
                 <a:latin typeface="Amiri" pitchFamily="2" charset="-78"/>
+                <a:ea typeface="Amiri" pitchFamily="2" charset="-78"/>
                 <a:cs typeface="Amiri" pitchFamily="2" charset="-78"/>
               </a:rPr>
               <a:t> أَدْرُسُ </a:t>
@@ -12548,6 +12611,7 @@
                   <a:srgbClr val="0E7C86"/>
                 </a:solidFill>
                 <a:latin typeface="Amiri" pitchFamily="2" charset="-78"/>
+                <a:ea typeface="Amiri" pitchFamily="2" charset="-78"/>
                 <a:cs typeface="Amiri" pitchFamily="2" charset="-78"/>
               </a:rPr>
               <a:t>هُنَا فِي غُرْفَتِي</a:t>
@@ -12574,6 +12638,7 @@
                   <a:srgbClr val="D6336C"/>
                 </a:solidFill>
                 <a:latin typeface="Amiri" pitchFamily="2" charset="-78"/>
+                <a:ea typeface="Amiri" pitchFamily="2" charset="-78"/>
                 <a:cs typeface="Amiri" pitchFamily="2" charset="-78"/>
               </a:rPr>
               <a:t>بِهُدُوءٍ</a:t>
@@ -12587,6 +12652,7 @@
                   <a:srgbClr val="1B3B6F"/>
                 </a:solidFill>
                 <a:latin typeface="Amiri" pitchFamily="2" charset="-78"/>
+                <a:ea typeface="Amiri" pitchFamily="2" charset="-78"/>
                 <a:cs typeface="Amiri" pitchFamily="2" charset="-78"/>
               </a:rPr>
               <a:t>، وَ</a:t>
@@ -12600,6 +12666,7 @@
                   <a:srgbClr val="0E7C86"/>
                 </a:solidFill>
                 <a:latin typeface="Amiri" pitchFamily="2" charset="-78"/>
+                <a:ea typeface="Amiri" pitchFamily="2" charset="-78"/>
                 <a:cs typeface="Amiri" pitchFamily="2" charset="-78"/>
               </a:rPr>
               <a:t>غَدًا</a:t>
@@ -12613,6 +12680,7 @@
                   <a:srgbClr val="1B3B6F"/>
                 </a:solidFill>
                 <a:latin typeface="Amiri" pitchFamily="2" charset="-78"/>
+                <a:ea typeface="Amiri" pitchFamily="2" charset="-78"/>
                 <a:cs typeface="Amiri" pitchFamily="2" charset="-78"/>
               </a:rPr>
               <a:t> سَأَدْرُسُ </a:t>
@@ -12626,6 +12694,7 @@
                   <a:srgbClr val="D6336C"/>
                 </a:solidFill>
                 <a:latin typeface="Amiri" pitchFamily="2" charset="-78"/>
+                <a:ea typeface="Amiri" pitchFamily="2" charset="-78"/>
                 <a:cs typeface="Amiri" pitchFamily="2" charset="-78"/>
               </a:rPr>
               <a:t>مَعَ صَدِيقِي</a:t>
@@ -12652,6 +12721,7 @@
                   <a:srgbClr val="0E7C86"/>
                 </a:solidFill>
                 <a:latin typeface="Amiri" pitchFamily="2" charset="-78"/>
+                <a:ea typeface="Amiri" pitchFamily="2" charset="-78"/>
                 <a:cs typeface="Amiri" pitchFamily="2" charset="-78"/>
               </a:rPr>
               <a:t>فِي الْمَكْتَبَةِ</a:t>
@@ -12836,6 +12906,7 @@
                   <a:srgbClr val="D4AF37"/>
                 </a:solidFill>
                 <a:latin typeface="Amiri" pitchFamily="2" charset="-78"/>
+                <a:ea typeface="Amiri" pitchFamily="2" charset="-78"/>
                 <a:cs typeface="Amiri" pitchFamily="2" charset="-78"/>
               </a:rPr>
               <a:t>م</a:t>
@@ -13156,6 +13227,7 @@
                   <a:srgbClr val="8A6D1E"/>
                 </a:solidFill>
                 <a:latin typeface="Amiri" pitchFamily="2" charset="-78"/>
+                <a:ea typeface="Amiri" pitchFamily="2" charset="-78"/>
                 <a:cs typeface="Amiri" pitchFamily="2" charset="-78"/>
               </a:rPr>
               <a:t>جُمَلٌ نَمُوذَجِيَّةٌ</a:t>
@@ -13329,6 +13401,7 @@
                   <a:srgbClr val="1B3B6F"/>
                 </a:solidFill>
                 <a:latin typeface="Amiri" pitchFamily="2" charset="-78"/>
+                <a:ea typeface="Amiri" pitchFamily="2" charset="-78"/>
                 <a:cs typeface="Amiri" pitchFamily="2" charset="-78"/>
               </a:rPr>
               <a:t>أَسْتَيْقِظُ مُبَكِّرًا كُلَّ يَوْمٍ.</a:t>
@@ -13518,6 +13591,7 @@
                   <a:srgbClr val="1B3B6F"/>
                 </a:solidFill>
                 <a:latin typeface="Amiri" pitchFamily="2" charset="-78"/>
+                <a:ea typeface="Amiri" pitchFamily="2" charset="-78"/>
                 <a:cs typeface="Amiri" pitchFamily="2" charset="-78"/>
               </a:rPr>
               <a:t>الْحَقِيبَةُ تَحْتَ الْكُرْسِيِّ.</a:t>
@@ -13707,6 +13781,7 @@
                   <a:srgbClr val="1B3B6F"/>
                 </a:solidFill>
                 <a:latin typeface="Amiri" pitchFamily="2" charset="-78"/>
+                <a:ea typeface="Amiri" pitchFamily="2" charset="-78"/>
                 <a:cs typeface="Amiri" pitchFamily="2" charset="-78"/>
               </a:rPr>
               <a:t>تَكَلَّمَتِ الْمُعَلِّمَةُ بِوُضُوحٍ.</a:t>
@@ -13896,6 +13971,7 @@
                   <a:srgbClr val="1B3B6F"/>
                 </a:solidFill>
                 <a:latin typeface="Amiri" pitchFamily="2" charset="-78"/>
+                <a:ea typeface="Amiri" pitchFamily="2" charset="-78"/>
                 <a:cs typeface="Amiri" pitchFamily="2" charset="-78"/>
               </a:rPr>
               <a:t>أَحْيَانًا نَأْكُلُ مَعًا فِي الْمَطْعَمِ.</a:t>
@@ -14083,6 +14159,7 @@
                   <a:srgbClr val="D4AF37"/>
                 </a:solidFill>
                 <a:latin typeface="Amiri" pitchFamily="2" charset="-78"/>
+                <a:ea typeface="Amiri" pitchFamily="2" charset="-78"/>
                 <a:cs typeface="Amiri" pitchFamily="2" charset="-78"/>
               </a:rPr>
               <a:t>م</a:t>
@@ -14403,6 +14480,7 @@
                   <a:srgbClr val="8A6D1E"/>
                 </a:solidFill>
                 <a:latin typeface="Amiri" pitchFamily="2" charset="-78"/>
+                <a:ea typeface="Amiri" pitchFamily="2" charset="-78"/>
                 <a:cs typeface="Amiri" pitchFamily="2" charset="-78"/>
               </a:rPr>
               <a:t>مَتَى؟ أَيْنَ؟ كَيْفَ؟</a:t>
@@ -14513,6 +14591,7 @@
                   <a:srgbClr val="1B3B6F"/>
                 </a:solidFill>
                 <a:latin typeface="Amiri" pitchFamily="2" charset="-78"/>
+                <a:ea typeface="Amiri" pitchFamily="2" charset="-78"/>
                 <a:cs typeface="Amiri" pitchFamily="2" charset="-78"/>
               </a:rPr>
               <a:t>غَدًا</a:t>
@@ -14585,6 +14664,7 @@
                   <a:srgbClr val="1B3B6F"/>
                 </a:solidFill>
                 <a:latin typeface="Amiri" pitchFamily="2" charset="-78"/>
+                <a:ea typeface="Amiri" pitchFamily="2" charset="-78"/>
                 <a:cs typeface="Amiri" pitchFamily="2" charset="-78"/>
               </a:rPr>
               <a:t>هُنَا</a:t>
@@ -14657,6 +14737,7 @@
                   <a:srgbClr val="1B3B6F"/>
                 </a:solidFill>
                 <a:latin typeface="Amiri" pitchFamily="2" charset="-78"/>
+                <a:ea typeface="Amiri" pitchFamily="2" charset="-78"/>
                 <a:cs typeface="Amiri" pitchFamily="2" charset="-78"/>
               </a:rPr>
               <a:t>بِهُدُوءٍ</a:t>
@@ -14729,6 +14810,7 @@
                   <a:srgbClr val="1B3B6F"/>
                 </a:solidFill>
                 <a:latin typeface="Amiri" pitchFamily="2" charset="-78"/>
+                <a:ea typeface="Amiri" pitchFamily="2" charset="-78"/>
                 <a:cs typeface="Amiri" pitchFamily="2" charset="-78"/>
               </a:rPr>
               <a:t>الآنَ</a:t>
@@ -14801,6 +14883,7 @@
                   <a:srgbClr val="1B3B6F"/>
                 </a:solidFill>
                 <a:latin typeface="Amiri" pitchFamily="2" charset="-78"/>
+                <a:ea typeface="Amiri" pitchFamily="2" charset="-78"/>
                 <a:cs typeface="Amiri" pitchFamily="2" charset="-78"/>
               </a:rPr>
               <a:t>تَحْتَ الْكُرْسِيِّ</a:t>
@@ -14873,6 +14956,7 @@
                   <a:srgbClr val="1B3B6F"/>
                 </a:solidFill>
                 <a:latin typeface="Amiri" pitchFamily="2" charset="-78"/>
+                <a:ea typeface="Amiri" pitchFamily="2" charset="-78"/>
                 <a:cs typeface="Amiri" pitchFamily="2" charset="-78"/>
               </a:rPr>
               <a:t>جَيِّدًا</a:t>
@@ -14945,6 +15029,7 @@
                   <a:srgbClr val="1B3B6F"/>
                 </a:solidFill>
                 <a:latin typeface="Amiri" pitchFamily="2" charset="-78"/>
+                <a:ea typeface="Amiri" pitchFamily="2" charset="-78"/>
                 <a:cs typeface="Amiri" pitchFamily="2" charset="-78"/>
               </a:rPr>
               <a:t>أَمْسِ</a:t>
@@ -15017,6 +15102,7 @@
                   <a:srgbClr val="1B3B6F"/>
                 </a:solidFill>
                 <a:latin typeface="Amiri" pitchFamily="2" charset="-78"/>
+                <a:ea typeface="Amiri" pitchFamily="2" charset="-78"/>
                 <a:cs typeface="Amiri" pitchFamily="2" charset="-78"/>
               </a:rPr>
               <a:t>فَوْقَ الْمَكْتَبِ</a:t>
@@ -15089,6 +15175,7 @@
                   <a:srgbClr val="1B3B6F"/>
                 </a:solidFill>
                 <a:latin typeface="Amiri" pitchFamily="2" charset="-78"/>
+                <a:ea typeface="Amiri" pitchFamily="2" charset="-78"/>
                 <a:cs typeface="Amiri" pitchFamily="2" charset="-78"/>
               </a:rPr>
               <a:t>مَعًا</a:t>
@@ -15498,6 +15585,7 @@
                   <a:srgbClr val="D4AF37"/>
                 </a:solidFill>
                 <a:latin typeface="Amiri" pitchFamily="2" charset="-78"/>
+                <a:ea typeface="Amiri" pitchFamily="2" charset="-78"/>
                 <a:cs typeface="Amiri" pitchFamily="2" charset="-78"/>
               </a:rPr>
               <a:t>م</a:t>
@@ -15818,6 +15906,7 @@
                   <a:srgbClr val="8A6D1E"/>
                 </a:solidFill>
                 <a:latin typeface="Amiri" pitchFamily="2" charset="-78"/>
+                <a:ea typeface="Amiri" pitchFamily="2" charset="-78"/>
                 <a:cs typeface="Amiri" pitchFamily="2" charset="-78"/>
               </a:rPr>
               <a:t>الإِجَابَاتُ</a:t>
@@ -16013,6 +16102,7 @@
                   <a:srgbClr val="1B3B6F"/>
                 </a:solidFill>
                 <a:latin typeface="Amiri" pitchFamily="2" charset="-78"/>
+                <a:ea typeface="Amiri" pitchFamily="2" charset="-78"/>
                 <a:cs typeface="Amiri" pitchFamily="2" charset="-78"/>
               </a:rPr>
               <a:t>غَدًا</a:t>
@@ -16078,6 +16168,7 @@
                   <a:srgbClr val="1B3B6F"/>
                 </a:solidFill>
                 <a:latin typeface="Amiri" pitchFamily="2" charset="-78"/>
+                <a:ea typeface="Amiri" pitchFamily="2" charset="-78"/>
                 <a:cs typeface="Amiri" pitchFamily="2" charset="-78"/>
               </a:rPr>
               <a:t>الآنَ</a:t>
@@ -16143,6 +16234,7 @@
                   <a:srgbClr val="1B3B6F"/>
                 </a:solidFill>
                 <a:latin typeface="Amiri" pitchFamily="2" charset="-78"/>
+                <a:ea typeface="Amiri" pitchFamily="2" charset="-78"/>
                 <a:cs typeface="Amiri" pitchFamily="2" charset="-78"/>
               </a:rPr>
               <a:t>أَمْسِ</a:t>
@@ -16300,6 +16392,7 @@
                   <a:srgbClr val="1B3B6F"/>
                 </a:solidFill>
                 <a:latin typeface="Amiri" pitchFamily="2" charset="-78"/>
+                <a:ea typeface="Amiri" pitchFamily="2" charset="-78"/>
                 <a:cs typeface="Amiri" pitchFamily="2" charset="-78"/>
               </a:rPr>
               <a:t>هُنَا</a:t>
@@ -16365,6 +16458,7 @@
                   <a:srgbClr val="1B3B6F"/>
                 </a:solidFill>
                 <a:latin typeface="Amiri" pitchFamily="2" charset="-78"/>
+                <a:ea typeface="Amiri" pitchFamily="2" charset="-78"/>
                 <a:cs typeface="Amiri" pitchFamily="2" charset="-78"/>
               </a:rPr>
               <a:t>تَحْتَ الْكُرْسِيِّ</a:t>
@@ -16430,6 +16524,7 @@
                   <a:srgbClr val="1B3B6F"/>
                 </a:solidFill>
                 <a:latin typeface="Amiri" pitchFamily="2" charset="-78"/>
+                <a:ea typeface="Amiri" pitchFamily="2" charset="-78"/>
                 <a:cs typeface="Amiri" pitchFamily="2" charset="-78"/>
               </a:rPr>
               <a:t>فَوْقَ الْمَكْتَبِ</a:t>
@@ -16587,6 +16682,7 @@
                   <a:srgbClr val="1B3B6F"/>
                 </a:solidFill>
                 <a:latin typeface="Amiri" pitchFamily="2" charset="-78"/>
+                <a:ea typeface="Amiri" pitchFamily="2" charset="-78"/>
                 <a:cs typeface="Amiri" pitchFamily="2" charset="-78"/>
               </a:rPr>
               <a:t>بِهُدُوءٍ</a:t>
@@ -16652,6 +16748,7 @@
                   <a:srgbClr val="1B3B6F"/>
                 </a:solidFill>
                 <a:latin typeface="Amiri" pitchFamily="2" charset="-78"/>
+                <a:ea typeface="Amiri" pitchFamily="2" charset="-78"/>
                 <a:cs typeface="Amiri" pitchFamily="2" charset="-78"/>
               </a:rPr>
               <a:t>جَيِّدًا</a:t>
@@ -16717,6 +16814,7 @@
                   <a:srgbClr val="1B3B6F"/>
                 </a:solidFill>
                 <a:latin typeface="Amiri" pitchFamily="2" charset="-78"/>
+                <a:ea typeface="Amiri" pitchFamily="2" charset="-78"/>
                 <a:cs typeface="Amiri" pitchFamily="2" charset="-78"/>
               </a:rPr>
               <a:t>مَعًا</a:t>
@@ -16850,6 +16948,7 @@
                   <a:srgbClr val="D4AF37"/>
                 </a:solidFill>
                 <a:latin typeface="Amiri" pitchFamily="2" charset="-78"/>
+                <a:ea typeface="Amiri" pitchFamily="2" charset="-78"/>
                 <a:cs typeface="Amiri" pitchFamily="2" charset="-78"/>
               </a:rPr>
               <a:t>م</a:t>
@@ -17170,6 +17269,7 @@
                   <a:srgbClr val="8A6D1E"/>
                 </a:solidFill>
                 <a:latin typeface="Amiri" pitchFamily="2" charset="-78"/>
+                <a:ea typeface="Amiri" pitchFamily="2" charset="-78"/>
                 <a:cs typeface="Amiri" pitchFamily="2" charset="-78"/>
               </a:rPr>
               <a:t>صَحِّحِ الخَطَأَ</a:t>
@@ -17343,6 +17443,7 @@
                   <a:srgbClr val="B83227"/>
                 </a:solidFill>
                 <a:latin typeface="Amiri" pitchFamily="2" charset="-78"/>
+                <a:ea typeface="Amiri" pitchFamily="2" charset="-78"/>
                 <a:cs typeface="Amiri" pitchFamily="2" charset="-78"/>
               </a:rPr>
               <a:t>هَذَا قِطَارٌ سَرِيعًا.</a:t>
@@ -17516,6 +17617,7 @@
                   <a:srgbClr val="B83227"/>
                 </a:solidFill>
                 <a:latin typeface="Amiri" pitchFamily="2" charset="-78"/>
+                <a:ea typeface="Amiri" pitchFamily="2" charset="-78"/>
                 <a:cs typeface="Amiri" pitchFamily="2" charset="-78"/>
               </a:rPr>
               <a:t>الْحَقِيبَةُ تَحْتَ الْكُرْسِيُّ.</a:t>
@@ -17689,6 +17791,7 @@
                   <a:srgbClr val="B83227"/>
                 </a:solidFill>
                 <a:latin typeface="Amiri" pitchFamily="2" charset="-78"/>
+                <a:ea typeface="Amiri" pitchFamily="2" charset="-78"/>
                 <a:cs typeface="Amiri" pitchFamily="2" charset="-78"/>
               </a:rPr>
               <a:t>تَكَلَّمَ جَيِّدٌ.</a:t>
@@ -17860,6 +17963,7 @@
                   <a:srgbClr val="D4AF37"/>
                 </a:solidFill>
                 <a:latin typeface="Amiri" pitchFamily="2" charset="-78"/>
+                <a:ea typeface="Amiri" pitchFamily="2" charset="-78"/>
                 <a:cs typeface="Amiri" pitchFamily="2" charset="-78"/>
               </a:rPr>
               <a:t>م</a:t>
@@ -18180,6 +18284,7 @@
                   <a:srgbClr val="8A6D1E"/>
                 </a:solidFill>
                 <a:latin typeface="Amiri" pitchFamily="2" charset="-78"/>
+                <a:ea typeface="Amiri" pitchFamily="2" charset="-78"/>
                 <a:cs typeface="Amiri" pitchFamily="2" charset="-78"/>
               </a:rPr>
               <a:t>التَّصْحِيحُ وَالسَّبَبُ</a:t>
@@ -18290,6 +18395,7 @@
                   <a:srgbClr val="B83227"/>
                 </a:solidFill>
                 <a:latin typeface="Amiri" pitchFamily="2" charset="-78"/>
+                <a:ea typeface="Amiri" pitchFamily="2" charset="-78"/>
                 <a:cs typeface="Amiri" pitchFamily="2" charset="-78"/>
               </a:rPr>
               <a:t>هَذَا قِطَارٌ سَرِيعًا.</a:t>
@@ -18389,6 +18495,7 @@
                   <a:srgbClr val="1E6B52"/>
                 </a:solidFill>
                 <a:latin typeface="Amiri" pitchFamily="2" charset="-78"/>
+                <a:ea typeface="Amiri" pitchFamily="2" charset="-78"/>
                 <a:cs typeface="Amiri" pitchFamily="2" charset="-78"/>
               </a:rPr>
               <a:t>هَذَا قِطَارٌ سَرِيعٌ.</a:t>
@@ -18499,6 +18606,7 @@
                   <a:srgbClr val="B83227"/>
                 </a:solidFill>
                 <a:latin typeface="Amiri" pitchFamily="2" charset="-78"/>
+                <a:ea typeface="Amiri" pitchFamily="2" charset="-78"/>
                 <a:cs typeface="Amiri" pitchFamily="2" charset="-78"/>
               </a:rPr>
               <a:t>الْحَقِيبَةُ تَحْتَ الْكُرْسِيُّ.</a:t>
@@ -18598,6 +18706,7 @@
                   <a:srgbClr val="1E6B52"/>
                 </a:solidFill>
                 <a:latin typeface="Amiri" pitchFamily="2" charset="-78"/>
+                <a:ea typeface="Amiri" pitchFamily="2" charset="-78"/>
                 <a:cs typeface="Amiri" pitchFamily="2" charset="-78"/>
               </a:rPr>
               <a:t>الْحَقِيبَةُ تَحْتَ الْكُرْسِيِّ.</a:t>
@@ -18708,6 +18817,7 @@
                   <a:srgbClr val="B83227"/>
                 </a:solidFill>
                 <a:latin typeface="Amiri" pitchFamily="2" charset="-78"/>
+                <a:ea typeface="Amiri" pitchFamily="2" charset="-78"/>
                 <a:cs typeface="Amiri" pitchFamily="2" charset="-78"/>
               </a:rPr>
               <a:t>تَكَلَّمَ جَيِّدٌ.</a:t>
@@ -18807,6 +18917,7 @@
                   <a:srgbClr val="1E6B52"/>
                 </a:solidFill>
                 <a:latin typeface="Amiri" pitchFamily="2" charset="-78"/>
+                <a:ea typeface="Amiri" pitchFamily="2" charset="-78"/>
                 <a:cs typeface="Amiri" pitchFamily="2" charset="-78"/>
               </a:rPr>
               <a:t>تَكَلَّمَ جَيِّدًا.</a:t>
@@ -18978,6 +19089,7 @@
                   <a:srgbClr val="D4AF37"/>
                 </a:solidFill>
                 <a:latin typeface="Amiri" pitchFamily="2" charset="-78"/>
+                <a:ea typeface="Amiri" pitchFamily="2" charset="-78"/>
                 <a:cs typeface="Amiri" pitchFamily="2" charset="-78"/>
               </a:rPr>
               <a:t>م</a:t>
@@ -19363,6 +19475,7 @@
                   <a:srgbClr val="8A6D1E"/>
                 </a:solidFill>
                 <a:latin typeface="Amiri" pitchFamily="2" charset="-78"/>
+                <a:ea typeface="Amiri" pitchFamily="2" charset="-78"/>
                 <a:cs typeface="Amiri" pitchFamily="2" charset="-78"/>
               </a:rPr>
               <a:t>تَدْرِيبٌ إِضَافِيٌّ</a:t>
@@ -19637,6 +19750,7 @@
                   <a:srgbClr val="1F2A37"/>
                 </a:solidFill>
                 <a:latin typeface="Amiri" pitchFamily="2" charset="-78"/>
+                <a:ea typeface="Amiri" pitchFamily="2" charset="-78"/>
                 <a:cs typeface="Amiri" pitchFamily="2" charset="-78"/>
               </a:rPr>
               <a:t>الطِّفْلُ سَرِيعٌ.</a:t>
@@ -19738,6 +19852,7 @@
                   <a:srgbClr val="1F2A37"/>
                 </a:solidFill>
                 <a:latin typeface="Amiri" pitchFamily="2" charset="-78"/>
+                <a:ea typeface="Amiri" pitchFamily="2" charset="-78"/>
                 <a:cs typeface="Amiri" pitchFamily="2" charset="-78"/>
               </a:rPr>
               <a:t>يَرْكُضُ الطِّفْلُ سَرِيعَةٌ.</a:t>
@@ -19839,6 +19954,7 @@
                   <a:srgbClr val="1F2A37"/>
                 </a:solidFill>
                 <a:latin typeface="Amiri" pitchFamily="2" charset="-78"/>
+                <a:ea typeface="Amiri" pitchFamily="2" charset="-78"/>
                 <a:cs typeface="Amiri" pitchFamily="2" charset="-78"/>
               </a:rPr>
               <a:t>يَرْكُضُ الطِّفْلُ سَرِيعًا.</a:t>
@@ -20075,6 +20191,7 @@
                   <a:srgbClr val="1F2A37"/>
                 </a:solidFill>
                 <a:latin typeface="Amiri" pitchFamily="2" charset="-78"/>
+                <a:ea typeface="Amiri" pitchFamily="2" charset="-78"/>
                 <a:cs typeface="Amiri" pitchFamily="2" charset="-78"/>
               </a:rPr>
               <a:t>الطِّفْلُ سَرِيعًا</a:t>
@@ -20176,6 +20293,7 @@
                   <a:srgbClr val="1F2A37"/>
                 </a:solidFill>
                 <a:latin typeface="Amiri" pitchFamily="2" charset="-78"/>
+                <a:ea typeface="Amiri" pitchFamily="2" charset="-78"/>
                 <a:cs typeface="Amiri" pitchFamily="2" charset="-78"/>
               </a:rPr>
               <a:t>الطِّفْلُ السَّرِيعُ</a:t>
@@ -20277,6 +20395,7 @@
                   <a:srgbClr val="1F2A37"/>
                 </a:solidFill>
                 <a:latin typeface="Amiri" pitchFamily="2" charset="-78"/>
+                <a:ea typeface="Amiri" pitchFamily="2" charset="-78"/>
                 <a:cs typeface="Amiri" pitchFamily="2" charset="-78"/>
               </a:rPr>
               <a:t>يَرْكُضُ سَرِيعٌ</a:t>
@@ -20450,6 +20569,7 @@
                   <a:srgbClr val="1F2A37"/>
                 </a:solidFill>
                 <a:latin typeface="Amiri" pitchFamily="2" charset="-78"/>
+                <a:ea typeface="Amiri" pitchFamily="2" charset="-78"/>
                 <a:cs typeface="Amiri" pitchFamily="2" charset="-78"/>
               </a:rPr>
               <a:t>الصُّورَةُ ___ الْمَكْتَبِ.</a:t>
@@ -20551,6 +20671,7 @@
                   <a:srgbClr val="1F2A37"/>
                 </a:solidFill>
                 <a:latin typeface="Amiri" pitchFamily="2" charset="-78"/>
+                <a:ea typeface="Amiri" pitchFamily="2" charset="-78"/>
                 <a:cs typeface="Amiri" pitchFamily="2" charset="-78"/>
               </a:rPr>
               <a:t>جَيِّدًا</a:t>
@@ -20652,6 +20773,7 @@
                   <a:srgbClr val="1F2A37"/>
                 </a:solidFill>
                 <a:latin typeface="Amiri" pitchFamily="2" charset="-78"/>
+                <a:ea typeface="Amiri" pitchFamily="2" charset="-78"/>
                 <a:cs typeface="Amiri" pitchFamily="2" charset="-78"/>
               </a:rPr>
               <a:t>فَوْقَ</a:t>
@@ -20753,6 +20875,7 @@
                   <a:srgbClr val="1F2A37"/>
                 </a:solidFill>
                 <a:latin typeface="Amiri" pitchFamily="2" charset="-78"/>
+                <a:ea typeface="Amiri" pitchFamily="2" charset="-78"/>
                 <a:cs typeface="Amiri" pitchFamily="2" charset="-78"/>
               </a:rPr>
               <a:t>أَمْسِ</a:t>
@@ -20989,6 +21112,7 @@
                   <a:srgbClr val="1F2A37"/>
                 </a:solidFill>
                 <a:latin typeface="Amiri" pitchFamily="2" charset="-78"/>
+                <a:ea typeface="Amiri" pitchFamily="2" charset="-78"/>
                 <a:cs typeface="Amiri" pitchFamily="2" charset="-78"/>
               </a:rPr>
               <a:t>تَحْتَ الطَّاوِلَةُ</a:t>
@@ -21090,6 +21214,7 @@
                   <a:srgbClr val="1F2A37"/>
                 </a:solidFill>
                 <a:latin typeface="Amiri" pitchFamily="2" charset="-78"/>
+                <a:ea typeface="Amiri" pitchFamily="2" charset="-78"/>
                 <a:cs typeface="Amiri" pitchFamily="2" charset="-78"/>
               </a:rPr>
               <a:t>تَحْتُ الطَّاوِلَةَ</a:t>
@@ -21191,6 +21316,7 @@
                   <a:srgbClr val="1F2A37"/>
                 </a:solidFill>
                 <a:latin typeface="Amiri" pitchFamily="2" charset="-78"/>
+                <a:ea typeface="Amiri" pitchFamily="2" charset="-78"/>
                 <a:cs typeface="Amiri" pitchFamily="2" charset="-78"/>
               </a:rPr>
               <a:t>تَحْتَ الطَّاوِلَةِ</a:t>
@@ -21324,6 +21450,7 @@
                   <a:srgbClr val="D4AF37"/>
                 </a:solidFill>
                 <a:latin typeface="Amiri" pitchFamily="2" charset="-78"/>
+                <a:ea typeface="Amiri" pitchFamily="2" charset="-78"/>
                 <a:cs typeface="Amiri" pitchFamily="2" charset="-78"/>
               </a:rPr>
               <a:t>م</a:t>
@@ -21644,6 +21771,7 @@
                   <a:srgbClr val="8A6D1E"/>
                 </a:solidFill>
                 <a:latin typeface="Amiri" pitchFamily="2" charset="-78"/>
+                <a:ea typeface="Amiri" pitchFamily="2" charset="-78"/>
                 <a:cs typeface="Amiri" pitchFamily="2" charset="-78"/>
               </a:rPr>
               <a:t>آدَابُ الصَّفِّ</a:t>
@@ -23175,6 +23303,7 @@
                   <a:srgbClr val="D4AF37"/>
                 </a:solidFill>
                 <a:latin typeface="Amiri" pitchFamily="2" charset="-78"/>
+                <a:ea typeface="Amiri" pitchFamily="2" charset="-78"/>
                 <a:cs typeface="Amiri" pitchFamily="2" charset="-78"/>
               </a:rPr>
               <a:t>م</a:t>
@@ -23560,6 +23689,7 @@
                   <a:srgbClr val="8A6D1E"/>
                 </a:solidFill>
                 <a:latin typeface="Amiri" pitchFamily="2" charset="-78"/>
+                <a:ea typeface="Amiri" pitchFamily="2" charset="-78"/>
                 <a:cs typeface="Amiri" pitchFamily="2" charset="-78"/>
               </a:rPr>
               <a:t>الإِجَابَاتُ وَالتَّعْلِيلُ</a:t>
@@ -23834,6 +23964,7 @@
                   <a:srgbClr val="9AA1AB"/>
                 </a:solidFill>
                 <a:latin typeface="Amiri" pitchFamily="2" charset="-78"/>
+                <a:ea typeface="Amiri" pitchFamily="2" charset="-78"/>
                 <a:cs typeface="Amiri" pitchFamily="2" charset="-78"/>
               </a:rPr>
               <a:t>الطِّفْلُ سَرِيعٌ.</a:t>
@@ -23935,6 +24066,7 @@
                   <a:srgbClr val="9AA1AB"/>
                 </a:solidFill>
                 <a:latin typeface="Amiri" pitchFamily="2" charset="-78"/>
+                <a:ea typeface="Amiri" pitchFamily="2" charset="-78"/>
                 <a:cs typeface="Amiri" pitchFamily="2" charset="-78"/>
               </a:rPr>
               <a:t>يَرْكُضُ الطِّفْلُ سَرِيعَةٌ.</a:t>
@@ -24063,6 +24195,7 @@
                   <a:srgbClr val="1F2A37"/>
                 </a:solidFill>
                 <a:latin typeface="Amiri" pitchFamily="2" charset="-78"/>
+                <a:ea typeface="Amiri" pitchFamily="2" charset="-78"/>
                 <a:cs typeface="Amiri" pitchFamily="2" charset="-78"/>
               </a:rPr>
               <a:t>يَرْكُضُ الطِّفْلُ سَرِيعًا.</a:t>
@@ -24337,6 +24470,7 @@
                   <a:srgbClr val="9AA1AB"/>
                 </a:solidFill>
                 <a:latin typeface="Amiri" pitchFamily="2" charset="-78"/>
+                <a:ea typeface="Amiri" pitchFamily="2" charset="-78"/>
                 <a:cs typeface="Amiri" pitchFamily="2" charset="-78"/>
               </a:rPr>
               <a:t>الطِّفْلُ سَرِيعًا</a:t>
@@ -24465,6 +24599,7 @@
                   <a:srgbClr val="1F2A37"/>
                 </a:solidFill>
                 <a:latin typeface="Amiri" pitchFamily="2" charset="-78"/>
+                <a:ea typeface="Amiri" pitchFamily="2" charset="-78"/>
                 <a:cs typeface="Amiri" pitchFamily="2" charset="-78"/>
               </a:rPr>
               <a:t>الطِّفْلُ السَّرِيعُ</a:t>
@@ -24566,6 +24701,7 @@
                   <a:srgbClr val="9AA1AB"/>
                 </a:solidFill>
                 <a:latin typeface="Amiri" pitchFamily="2" charset="-78"/>
+                <a:ea typeface="Amiri" pitchFamily="2" charset="-78"/>
                 <a:cs typeface="Amiri" pitchFamily="2" charset="-78"/>
               </a:rPr>
               <a:t>يَرْكُضُ سَرِيعٌ</a:t>
@@ -24777,6 +24913,7 @@
                   <a:srgbClr val="1F2A37"/>
                 </a:solidFill>
                 <a:latin typeface="Amiri" pitchFamily="2" charset="-78"/>
+                <a:ea typeface="Amiri" pitchFamily="2" charset="-78"/>
                 <a:cs typeface="Amiri" pitchFamily="2" charset="-78"/>
               </a:rPr>
               <a:t>الصُّورَةُ ___ الْمَكْتَبِ.</a:t>
@@ -24878,6 +25015,7 @@
                   <a:srgbClr val="9AA1AB"/>
                 </a:solidFill>
                 <a:latin typeface="Amiri" pitchFamily="2" charset="-78"/>
+                <a:ea typeface="Amiri" pitchFamily="2" charset="-78"/>
                 <a:cs typeface="Amiri" pitchFamily="2" charset="-78"/>
               </a:rPr>
               <a:t>جَيِّدًا</a:t>
@@ -25006,6 +25144,7 @@
                   <a:srgbClr val="1F2A37"/>
                 </a:solidFill>
                 <a:latin typeface="Amiri" pitchFamily="2" charset="-78"/>
+                <a:ea typeface="Amiri" pitchFamily="2" charset="-78"/>
                 <a:cs typeface="Amiri" pitchFamily="2" charset="-78"/>
               </a:rPr>
               <a:t>فَوْقَ</a:t>
@@ -25107,6 +25246,7 @@
                   <a:srgbClr val="9AA1AB"/>
                 </a:solidFill>
                 <a:latin typeface="Amiri" pitchFamily="2" charset="-78"/>
+                <a:ea typeface="Amiri" pitchFamily="2" charset="-78"/>
                 <a:cs typeface="Amiri" pitchFamily="2" charset="-78"/>
               </a:rPr>
               <a:t>أَمْسِ</a:t>
@@ -25381,6 +25521,7 @@
                   <a:srgbClr val="9AA1AB"/>
                 </a:solidFill>
                 <a:latin typeface="Amiri" pitchFamily="2" charset="-78"/>
+                <a:ea typeface="Amiri" pitchFamily="2" charset="-78"/>
                 <a:cs typeface="Amiri" pitchFamily="2" charset="-78"/>
               </a:rPr>
               <a:t>تَحْتَ الطَّاوِلَةُ</a:t>
@@ -25482,6 +25623,7 @@
                   <a:srgbClr val="9AA1AB"/>
                 </a:solidFill>
                 <a:latin typeface="Amiri" pitchFamily="2" charset="-78"/>
+                <a:ea typeface="Amiri" pitchFamily="2" charset="-78"/>
                 <a:cs typeface="Amiri" pitchFamily="2" charset="-78"/>
               </a:rPr>
               <a:t>تَحْتُ الطَّاوِلَةَ</a:t>
@@ -25610,6 +25752,7 @@
                   <a:srgbClr val="1F2A37"/>
                 </a:solidFill>
                 <a:latin typeface="Amiri" pitchFamily="2" charset="-78"/>
+                <a:ea typeface="Amiri" pitchFamily="2" charset="-78"/>
                 <a:cs typeface="Amiri" pitchFamily="2" charset="-78"/>
               </a:rPr>
               <a:t>تَحْتَ الطَّاوِلَةِ</a:t>
@@ -25781,6 +25924,7 @@
                   <a:srgbClr val="D4AF37"/>
                 </a:solidFill>
                 <a:latin typeface="Amiri" pitchFamily="2" charset="-78"/>
+                <a:ea typeface="Amiri" pitchFamily="2" charset="-78"/>
                 <a:cs typeface="Amiri" pitchFamily="2" charset="-78"/>
               </a:rPr>
               <a:t>م</a:t>
@@ -26101,6 +26245,7 @@
                   <a:srgbClr val="8A6D1E"/>
                 </a:solidFill>
                 <a:latin typeface="Amiri" pitchFamily="2" charset="-78"/>
+                <a:ea typeface="Amiri" pitchFamily="2" charset="-78"/>
                 <a:cs typeface="Amiri" pitchFamily="2" charset="-78"/>
               </a:rPr>
               <a:t>اِقْرَأْ وَلَاحِظْ</a:t>
@@ -26214,6 +26359,7 @@
                   <a:srgbClr val="1F2A37"/>
                 </a:solidFill>
                 <a:latin typeface="Amiri" pitchFamily="2" charset="-78"/>
+                <a:ea typeface="Amiri" pitchFamily="2" charset="-78"/>
                 <a:cs typeface="Amiri" pitchFamily="2" charset="-78"/>
               </a:rPr>
               <a:t>أَسْتَيْقِظُ مُبَكِّرًا كُلَّ يَوْمٍ. أَدْرُسُ هُنَا فِي غُرْفَتِي، وَأَكْتُبُ وَاجِبِي بِعِنَايَةٍ. غَدًا سَأَدْرُسُ مَعَ صَدِيقَتِي هُنَاكَ فِي الْمَكْتَبَةِ. أَحْيَانًا نَقْرَأُ بِصَوْتٍ عَالٍ، وَلَكِنَّ الْمَكْتَبَةَ هَادِئَةٌ دَائِمًا.</a:t>
@@ -26324,6 +26470,7 @@
                   <a:srgbClr val="1B3B6F"/>
                 </a:solidFill>
                 <a:latin typeface="Amiri" pitchFamily="2" charset="-78"/>
+                <a:ea typeface="Amiri" pitchFamily="2" charset="-78"/>
                 <a:cs typeface="Amiri" pitchFamily="2" charset="-78"/>
               </a:rPr>
               <a:t>أَسْتَيْقِظُ</a:t>
@@ -26400,6 +26547,7 @@
                   <a:srgbClr val="1B3B6F"/>
                 </a:solidFill>
                 <a:latin typeface="Amiri" pitchFamily="2" charset="-78"/>
+                <a:ea typeface="Amiri" pitchFamily="2" charset="-78"/>
                 <a:cs typeface="Amiri" pitchFamily="2" charset="-78"/>
               </a:rPr>
               <a:t>مُبَكِّرًا</a:t>
@@ -26476,6 +26624,7 @@
                   <a:srgbClr val="1B3B6F"/>
                 </a:solidFill>
                 <a:latin typeface="Amiri" pitchFamily="2" charset="-78"/>
+                <a:ea typeface="Amiri" pitchFamily="2" charset="-78"/>
                 <a:cs typeface="Amiri" pitchFamily="2" charset="-78"/>
               </a:rPr>
               <a:t>وَاجِبِي</a:t>
@@ -26552,6 +26701,7 @@
                   <a:srgbClr val="1B3B6F"/>
                 </a:solidFill>
                 <a:latin typeface="Amiri" pitchFamily="2" charset="-78"/>
+                <a:ea typeface="Amiri" pitchFamily="2" charset="-78"/>
                 <a:cs typeface="Amiri" pitchFamily="2" charset="-78"/>
               </a:rPr>
               <a:t>بِعِنَايَةٍ</a:t>
@@ -26628,6 +26778,7 @@
                   <a:srgbClr val="1B3B6F"/>
                 </a:solidFill>
                 <a:latin typeface="Amiri" pitchFamily="2" charset="-78"/>
+                <a:ea typeface="Amiri" pitchFamily="2" charset="-78"/>
                 <a:cs typeface="Amiri" pitchFamily="2" charset="-78"/>
               </a:rPr>
               <a:t>سَأَدْرُسُ</a:t>
@@ -26704,6 +26855,7 @@
                   <a:srgbClr val="1B3B6F"/>
                 </a:solidFill>
                 <a:latin typeface="Amiri" pitchFamily="2" charset="-78"/>
+                <a:ea typeface="Amiri" pitchFamily="2" charset="-78"/>
                 <a:cs typeface="Amiri" pitchFamily="2" charset="-78"/>
               </a:rPr>
               <a:t>بِصَوْتٍ عَالٍ</a:t>
@@ -26780,6 +26932,7 @@
                   <a:srgbClr val="1B3B6F"/>
                 </a:solidFill>
                 <a:latin typeface="Amiri" pitchFamily="2" charset="-78"/>
+                <a:ea typeface="Amiri" pitchFamily="2" charset="-78"/>
                 <a:cs typeface="Amiri" pitchFamily="2" charset="-78"/>
               </a:rPr>
               <a:t>هَادِئَةٌ</a:t>
@@ -26951,6 +27104,7 @@
                   <a:srgbClr val="D4AF37"/>
                 </a:solidFill>
                 <a:latin typeface="Amiri" pitchFamily="2" charset="-78"/>
+                <a:ea typeface="Amiri" pitchFamily="2" charset="-78"/>
                 <a:cs typeface="Amiri" pitchFamily="2" charset="-78"/>
               </a:rPr>
               <a:t>م</a:t>
@@ -27271,6 +27425,7 @@
                   <a:srgbClr val="8A6D1E"/>
                 </a:solidFill>
                 <a:latin typeface="Amiri" pitchFamily="2" charset="-78"/>
+                <a:ea typeface="Amiri" pitchFamily="2" charset="-78"/>
                 <a:cs typeface="Amiri" pitchFamily="2" charset="-78"/>
               </a:rPr>
               <a:t>أَسْئِلَةُ القِرَاءَةِ</a:t>
@@ -28859,6 +29014,7 @@
                   <a:srgbClr val="1F2A37"/>
                 </a:solidFill>
                 <a:latin typeface="Amiri" pitchFamily="2" charset="-78"/>
+                <a:ea typeface="Amiri" pitchFamily="2" charset="-78"/>
                 <a:cs typeface="Amiri" pitchFamily="2" charset="-78"/>
               </a:rPr>
               <a:t>هُنَاكَ</a:t>
@@ -28960,6 +29116,7 @@
                   <a:srgbClr val="1F2A37"/>
                 </a:solidFill>
                 <a:latin typeface="Amiri" pitchFamily="2" charset="-78"/>
+                <a:ea typeface="Amiri" pitchFamily="2" charset="-78"/>
                 <a:cs typeface="Amiri" pitchFamily="2" charset="-78"/>
               </a:rPr>
               <a:t>أَحْيَانًا</a:t>
@@ -29061,6 +29218,7 @@
                   <a:srgbClr val="1F2A37"/>
                 </a:solidFill>
                 <a:latin typeface="Amiri" pitchFamily="2" charset="-78"/>
+                <a:ea typeface="Amiri" pitchFamily="2" charset="-78"/>
                 <a:cs typeface="Amiri" pitchFamily="2" charset="-78"/>
               </a:rPr>
               <a:t>بِعِنَايَةٍ</a:t>
@@ -29336,6 +29494,7 @@
                   <a:srgbClr val="D4AF37"/>
                 </a:solidFill>
                 <a:latin typeface="Amiri" pitchFamily="2" charset="-78"/>
+                <a:ea typeface="Amiri" pitchFamily="2" charset="-78"/>
                 <a:cs typeface="Amiri" pitchFamily="2" charset="-78"/>
               </a:rPr>
               <a:t>م</a:t>
@@ -29656,6 +29815,7 @@
                   <a:srgbClr val="8A6D1E"/>
                 </a:solidFill>
                 <a:latin typeface="Amiri" pitchFamily="2" charset="-78"/>
+                <a:ea typeface="Amiri" pitchFamily="2" charset="-78"/>
                 <a:cs typeface="Amiri" pitchFamily="2" charset="-78"/>
               </a:rPr>
               <a:t>إِجَابَاتُ القِرَاءَةِ</a:t>
@@ -30197,6 +30357,7 @@
                   <a:srgbClr val="8A6D1E"/>
                 </a:solidFill>
                 <a:latin typeface="Amiri" pitchFamily="2" charset="-78"/>
+                <a:ea typeface="Amiri" pitchFamily="2" charset="-78"/>
                 <a:cs typeface="Amiri" pitchFamily="2" charset="-78"/>
               </a:rPr>
               <a:t>مُبَكِّرًا</a:t>
@@ -30713,6 +30874,7 @@
                   <a:srgbClr val="8A6D1E"/>
                 </a:solidFill>
                 <a:latin typeface="Amiri" pitchFamily="2" charset="-78"/>
+                <a:ea typeface="Amiri" pitchFamily="2" charset="-78"/>
                 <a:cs typeface="Amiri" pitchFamily="2" charset="-78"/>
               </a:rPr>
               <a:t>بِعِنَايَةٍ</a:t>
@@ -31229,6 +31391,7 @@
                   <a:srgbClr val="8A6D1E"/>
                 </a:solidFill>
                 <a:latin typeface="Amiri" pitchFamily="2" charset="-78"/>
+                <a:ea typeface="Amiri" pitchFamily="2" charset="-78"/>
                 <a:cs typeface="Amiri" pitchFamily="2" charset="-78"/>
               </a:rPr>
               <a:t>هُنَاكَ فِي الْمَكْتَبَةِ.</a:t>
@@ -31465,6 +31628,7 @@
                   <a:srgbClr val="9AA1AB"/>
                 </a:solidFill>
                 <a:latin typeface="Amiri" pitchFamily="2" charset="-78"/>
+                <a:ea typeface="Amiri" pitchFamily="2" charset="-78"/>
                 <a:cs typeface="Amiri" pitchFamily="2" charset="-78"/>
               </a:rPr>
               <a:t>هُنَاكَ</a:t>
@@ -31593,6 +31757,7 @@
                   <a:srgbClr val="1F2A37"/>
                 </a:solidFill>
                 <a:latin typeface="Amiri" pitchFamily="2" charset="-78"/>
+                <a:ea typeface="Amiri" pitchFamily="2" charset="-78"/>
                 <a:cs typeface="Amiri" pitchFamily="2" charset="-78"/>
               </a:rPr>
               <a:t>أَحْيَانًا</a:t>
@@ -31694,6 +31859,7 @@
                   <a:srgbClr val="9AA1AB"/>
                 </a:solidFill>
                 <a:latin typeface="Amiri" pitchFamily="2" charset="-78"/>
+                <a:ea typeface="Amiri" pitchFamily="2" charset="-78"/>
                 <a:cs typeface="Amiri" pitchFamily="2" charset="-78"/>
               </a:rPr>
               <a:t>بِعِنَايَةٍ</a:t>
@@ -32007,6 +32173,7 @@
                   <a:srgbClr val="D4AF37"/>
                 </a:solidFill>
                 <a:latin typeface="Amiri" pitchFamily="2" charset="-78"/>
+                <a:ea typeface="Amiri" pitchFamily="2" charset="-78"/>
                 <a:cs typeface="Amiri" pitchFamily="2" charset="-78"/>
               </a:rPr>
               <a:t>م</a:t>
@@ -32327,6 +32494,7 @@
                   <a:srgbClr val="8A6D1E"/>
                 </a:solidFill>
                 <a:latin typeface="Amiri" pitchFamily="2" charset="-78"/>
+                <a:ea typeface="Amiri" pitchFamily="2" charset="-78"/>
                 <a:cs typeface="Amiri" pitchFamily="2" charset="-78"/>
               </a:rPr>
               <a:t>التَّحَدُّثُ</a:t>
@@ -33097,6 +33265,7 @@
                   <a:srgbClr val="1B3B6F"/>
                 </a:solidFill>
                 <a:latin typeface="Amiri" pitchFamily="2" charset="-78"/>
+                <a:ea typeface="Amiri" pitchFamily="2" charset="-78"/>
                 <a:cs typeface="Amiri" pitchFamily="2" charset="-78"/>
               </a:rPr>
               <a:t>مَتَى تَدْرُسُ؟ أَيْنَ تَدْرُسُ؟</a:t>
@@ -33234,6 +33403,7 @@
                   <a:srgbClr val="1B3B6F"/>
                 </a:solidFill>
                 <a:latin typeface="Amiri" pitchFamily="2" charset="-78"/>
+                <a:ea typeface="Amiri" pitchFamily="2" charset="-78"/>
                 <a:cs typeface="Amiri" pitchFamily="2" charset="-78"/>
               </a:rPr>
               <a:t>كَيْفَ تَدْرُسُ؟ (بِسُرْعَةٍ، بِهُدُوءٍ، مَعَ صَدِيقٍ …)</a:t>
@@ -33371,6 +33541,7 @@
                   <a:srgbClr val="1B3B6F"/>
                 </a:solidFill>
                 <a:latin typeface="Amiri" pitchFamily="2" charset="-78"/>
+                <a:ea typeface="Amiri" pitchFamily="2" charset="-78"/>
                 <a:cs typeface="Amiri" pitchFamily="2" charset="-78"/>
               </a:rPr>
               <a:t>صِفْ ثَلَاثَةَ أَعْمَالٍ: مَتَى وَأَيْنَ وَكَيْفَ؟</a:t>
@@ -33546,6 +33717,7 @@
                   <a:srgbClr val="1D5FBF"/>
                 </a:solidFill>
                 <a:latin typeface="Amiri" pitchFamily="2" charset="-78"/>
+                <a:ea typeface="Amiri" pitchFamily="2" charset="-78"/>
                 <a:cs typeface="Amiri" pitchFamily="2" charset="-78"/>
               </a:rPr>
               <a:t>أَدْرُسُ ___ فِي ___ .</a:t>
@@ -33649,6 +33821,7 @@
                   <a:srgbClr val="1F2A37"/>
                 </a:solidFill>
                 <a:latin typeface="Amiri" pitchFamily="2" charset="-78"/>
+                <a:ea typeface="Amiri" pitchFamily="2" charset="-78"/>
                 <a:cs typeface="Amiri" pitchFamily="2" charset="-78"/>
               </a:rPr>
               <a:t>أَدْرُسُ ___ ، وَأَكْتُبُ ___ .</a:t>
@@ -33752,6 +33925,7 @@
                   <a:srgbClr val="1F2A37"/>
                 </a:solidFill>
                 <a:latin typeface="Amiri" pitchFamily="2" charset="-78"/>
+                <a:ea typeface="Amiri" pitchFamily="2" charset="-78"/>
                 <a:cs typeface="Amiri" pitchFamily="2" charset="-78"/>
               </a:rPr>
               <a:t>___ أُصَلِّي ___ ___ .</a:t>
@@ -33925,6 +34099,7 @@
                   <a:srgbClr val="1F2A37"/>
                 </a:solidFill>
                 <a:latin typeface="Amiri" pitchFamily="2" charset="-78"/>
+                <a:ea typeface="Amiri" pitchFamily="2" charset="-78"/>
                 <a:cs typeface="Amiri" pitchFamily="2" charset="-78"/>
               </a:rPr>
               <a:t>مَتَى وَأَيْنَ تَلْعَبُ كُرَةَ الْقَدَمِ؟</a:t>
@@ -34064,6 +34239,7 @@
                   <a:srgbClr val="1F2A37"/>
                 </a:solidFill>
                 <a:latin typeface="Amiri" pitchFamily="2" charset="-78"/>
+                <a:ea typeface="Amiri" pitchFamily="2" charset="-78"/>
                 <a:cs typeface="Amiri" pitchFamily="2" charset="-78"/>
               </a:rPr>
               <a:t>أَلْعَبُ أَحْيَانًا يَوْمَ السَّبْتِ فِي الْحَدِيقَةِ خَلْفَ الْبَيْتِ، وَأَلْعَبُ بِحَمَاسٍ!</a:t>
@@ -34235,6 +34411,7 @@
                   <a:srgbClr val="D4AF37"/>
                 </a:solidFill>
                 <a:latin typeface="Amiri" pitchFamily="2" charset="-78"/>
+                <a:ea typeface="Amiri" pitchFamily="2" charset="-78"/>
                 <a:cs typeface="Amiri" pitchFamily="2" charset="-78"/>
               </a:rPr>
               <a:t>م</a:t>
@@ -34555,6 +34732,7 @@
                   <a:srgbClr val="8A6D1E"/>
                 </a:solidFill>
                 <a:latin typeface="Amiri" pitchFamily="2" charset="-78"/>
+                <a:ea typeface="Amiri" pitchFamily="2" charset="-78"/>
                 <a:cs typeface="Amiri" pitchFamily="2" charset="-78"/>
               </a:rPr>
               <a:t>اُكْتُبْ</a:t>
@@ -34730,6 +34908,7 @@
                   <a:srgbClr val="2E8B57"/>
                 </a:solidFill>
                 <a:latin typeface="Amiri" pitchFamily="2" charset="-78"/>
+                <a:ea typeface="Amiri" pitchFamily="2" charset="-78"/>
                 <a:cs typeface="Amiri" pitchFamily="2" charset="-78"/>
               </a:rPr>
               <a:t>الأَسَاسُ</a:t>
@@ -35024,6 +35203,7 @@
                   <a:srgbClr val="C9780A"/>
                 </a:solidFill>
                 <a:latin typeface="Amiri" pitchFamily="2" charset="-78"/>
+                <a:ea typeface="Amiri" pitchFamily="2" charset="-78"/>
                 <a:cs typeface="Amiri" pitchFamily="2" charset="-78"/>
               </a:rPr>
               <a:t>التَّطْوِيرُ</a:t>
@@ -35318,6 +35498,7 @@
                   <a:srgbClr val="B83227"/>
                 </a:solidFill>
                 <a:latin typeface="Amiri" pitchFamily="2" charset="-78"/>
+                <a:ea typeface="Amiri" pitchFamily="2" charset="-78"/>
                 <a:cs typeface="Amiri" pitchFamily="2" charset="-78"/>
               </a:rPr>
               <a:t>التَّحَدِّي</a:t>
@@ -35608,6 +35789,7 @@
                   <a:srgbClr val="D4AF37"/>
                 </a:solidFill>
                 <a:latin typeface="Amiri" pitchFamily="2" charset="-78"/>
+                <a:ea typeface="Amiri" pitchFamily="2" charset="-78"/>
                 <a:cs typeface="Amiri" pitchFamily="2" charset="-78"/>
               </a:rPr>
               <a:t>م</a:t>
@@ -35928,6 +36110,7 @@
                   <a:srgbClr val="8A6D1E"/>
                 </a:solidFill>
                 <a:latin typeface="Amiri" pitchFamily="2" charset="-78"/>
+                <a:ea typeface="Amiri" pitchFamily="2" charset="-78"/>
                 <a:cs typeface="Amiri" pitchFamily="2" charset="-78"/>
               </a:rPr>
               <a:t>قَوَالِبُ الجُمَلِ</a:t>
@@ -36103,6 +36286,7 @@
                   <a:srgbClr val="1B3B6F"/>
                 </a:solidFill>
                 <a:latin typeface="Amiri" pitchFamily="2" charset="-78"/>
+                <a:ea typeface="Amiri" pitchFamily="2" charset="-78"/>
                 <a:cs typeface="Amiri" pitchFamily="2" charset="-78"/>
               </a:rPr>
               <a:t>حَقِيبَتِي تَحْتَ ______ .</a:t>
@@ -36179,6 +36363,7 @@
                   <a:srgbClr val="1B3B6F"/>
                 </a:solidFill>
                 <a:latin typeface="Amiri" pitchFamily="2" charset="-78"/>
+                <a:ea typeface="Amiri" pitchFamily="2" charset="-78"/>
                 <a:cs typeface="Amiri" pitchFamily="2" charset="-78"/>
               </a:rPr>
               <a:t>خَلْفَ ______ حَدِيقَةٌ.</a:t>
@@ -36255,6 +36440,7 @@
                   <a:srgbClr val="1B3B6F"/>
                 </a:solidFill>
                 <a:latin typeface="Amiri" pitchFamily="2" charset="-78"/>
+                <a:ea typeface="Amiri" pitchFamily="2" charset="-78"/>
                 <a:cs typeface="Amiri" pitchFamily="2" charset="-78"/>
               </a:rPr>
               <a:t>أَكْتُبُ وَاجِبِي ______ .</a:t>
@@ -36331,6 +36517,7 @@
                   <a:srgbClr val="1B3B6F"/>
                 </a:solidFill>
                 <a:latin typeface="Amiri" pitchFamily="2" charset="-78"/>
+                <a:ea typeface="Amiri" pitchFamily="2" charset="-78"/>
                 <a:cs typeface="Amiri" pitchFamily="2" charset="-78"/>
               </a:rPr>
               <a:t>غَدًا ______ .</a:t>
@@ -36506,6 +36693,7 @@
                   <a:srgbClr val="1B3B6F"/>
                 </a:solidFill>
                 <a:latin typeface="Amiri" pitchFamily="2" charset="-78"/>
+                <a:ea typeface="Amiri" pitchFamily="2" charset="-78"/>
                 <a:cs typeface="Amiri" pitchFamily="2" charset="-78"/>
               </a:rPr>
               <a:t>الْيَوْمَ ______ .</a:t>
@@ -36582,6 +36770,7 @@
                   <a:srgbClr val="1B3B6F"/>
                 </a:solidFill>
                 <a:latin typeface="Amiri" pitchFamily="2" charset="-78"/>
+                <a:ea typeface="Amiri" pitchFamily="2" charset="-78"/>
                 <a:cs typeface="Amiri" pitchFamily="2" charset="-78"/>
               </a:rPr>
               <a:t>أَنَا دَائِمًا ______ .</a:t>
@@ -36658,6 +36847,7 @@
                   <a:srgbClr val="1B3B6F"/>
                 </a:solidFill>
                 <a:latin typeface="Amiri" pitchFamily="2" charset="-78"/>
+                <a:ea typeface="Amiri" pitchFamily="2" charset="-78"/>
                 <a:cs typeface="Amiri" pitchFamily="2" charset="-78"/>
               </a:rPr>
               <a:t>أَسْكُنُ ______ ، وَمَدْرَسَتِي ______ .</a:t>
@@ -36734,6 +36924,7 @@
                   <a:srgbClr val="1B3B6F"/>
                 </a:solidFill>
                 <a:latin typeface="Amiri" pitchFamily="2" charset="-78"/>
+                <a:ea typeface="Amiri" pitchFamily="2" charset="-78"/>
                 <a:cs typeface="Amiri" pitchFamily="2" charset="-78"/>
               </a:rPr>
               <a:t>أَكْتُبُ ______ .</a:t>
@@ -36882,6 +37073,7 @@
                   <a:srgbClr val="1B3B6F"/>
                 </a:solidFill>
                 <a:latin typeface="Amiri" pitchFamily="2" charset="-78"/>
+                <a:ea typeface="Amiri" pitchFamily="2" charset="-78"/>
                 <a:cs typeface="Amiri" pitchFamily="2" charset="-78"/>
               </a:rPr>
               <a:t>الْيَوْمَ  ·  أَمْسِ  ·  غَدًا  ·  الآنَ  ·  دَائِمًا  ·  أَحْيَانًا  ·  هُنَا  ·  هُنَاكَ  ·  أَمَامَ  ·  خَلْفَ  ·  تَحْتَ  ·  فَوْقَ  ·  جَيِّدًا  ·  بِسُرْعَةٍ  ·  بِعِنَايَةٍ  ·  مَعًا</a:t>
@@ -37015,6 +37207,7 @@
                   <a:srgbClr val="D4AF37"/>
                 </a:solidFill>
                 <a:latin typeface="Amiri" pitchFamily="2" charset="-78"/>
+                <a:ea typeface="Amiri" pitchFamily="2" charset="-78"/>
                 <a:cs typeface="Amiri" pitchFamily="2" charset="-78"/>
               </a:rPr>
               <a:t>م</a:t>
@@ -37335,6 +37528,7 @@
                   <a:srgbClr val="8A6D1E"/>
                 </a:solidFill>
                 <a:latin typeface="Amiri" pitchFamily="2" charset="-78"/>
+                <a:ea typeface="Amiri" pitchFamily="2" charset="-78"/>
                 <a:cs typeface="Amiri" pitchFamily="2" charset="-78"/>
               </a:rPr>
               <a:t>مُهِمَّةُ التَّحَدِّي</a:t>
@@ -37810,6 +38004,7 @@
                   <a:srgbClr val="1B3B6F"/>
                 </a:solidFill>
                 <a:latin typeface="Amiri" pitchFamily="2" charset="-78"/>
+                <a:ea typeface="Amiri" pitchFamily="2" charset="-78"/>
                 <a:cs typeface="Amiri" pitchFamily="2" charset="-78"/>
               </a:rPr>
               <a:t>فِي الصَّبَاحِ</a:t>
@@ -37886,6 +38081,7 @@
                   <a:srgbClr val="1B3B6F"/>
                 </a:solidFill>
                 <a:latin typeface="Amiri" pitchFamily="2" charset="-78"/>
+                <a:ea typeface="Amiri" pitchFamily="2" charset="-78"/>
                 <a:cs typeface="Amiri" pitchFamily="2" charset="-78"/>
               </a:rPr>
               <a:t>بَعْدَ الْمَدْرَسَةِ</a:t>
@@ -37962,6 +38158,7 @@
                   <a:srgbClr val="1B3B6F"/>
                 </a:solidFill>
                 <a:latin typeface="Amiri" pitchFamily="2" charset="-78"/>
+                <a:ea typeface="Amiri" pitchFamily="2" charset="-78"/>
                 <a:cs typeface="Amiri" pitchFamily="2" charset="-78"/>
               </a:rPr>
               <a:t>أَمَامَ الْبَيْتِ</a:t>
@@ -38038,6 +38235,7 @@
                   <a:srgbClr val="1B3B6F"/>
                 </a:solidFill>
                 <a:latin typeface="Amiri" pitchFamily="2" charset="-78"/>
+                <a:ea typeface="Amiri" pitchFamily="2" charset="-78"/>
                 <a:cs typeface="Amiri" pitchFamily="2" charset="-78"/>
               </a:rPr>
               <a:t>بِسُرْعَةٍ</a:t>
@@ -38114,6 +38312,7 @@
                   <a:srgbClr val="1B3B6F"/>
                 </a:solidFill>
                 <a:latin typeface="Amiri" pitchFamily="2" charset="-78"/>
+                <a:ea typeface="Amiri" pitchFamily="2" charset="-78"/>
                 <a:cs typeface="Amiri" pitchFamily="2" charset="-78"/>
               </a:rPr>
               <a:t>بِعِنَايَةٍ</a:t>
@@ -38190,6 +38389,7 @@
                   <a:srgbClr val="1B3B6F"/>
                 </a:solidFill>
                 <a:latin typeface="Amiri" pitchFamily="2" charset="-78"/>
+                <a:ea typeface="Amiri" pitchFamily="2" charset="-78"/>
                 <a:cs typeface="Amiri" pitchFamily="2" charset="-78"/>
               </a:rPr>
               <a:t>مَعَ عَائِلَتِي</a:t>
@@ -38361,6 +38561,7 @@
                   <a:srgbClr val="D4AF37"/>
                 </a:solidFill>
                 <a:latin typeface="Amiri" pitchFamily="2" charset="-78"/>
+                <a:ea typeface="Amiri" pitchFamily="2" charset="-78"/>
                 <a:cs typeface="Amiri" pitchFamily="2" charset="-78"/>
               </a:rPr>
               <a:t>م</a:t>
@@ -38681,6 +38882,7 @@
                   <a:srgbClr val="8A6D1E"/>
                 </a:solidFill>
                 <a:latin typeface="Amiri" pitchFamily="2" charset="-78"/>
+                <a:ea typeface="Amiri" pitchFamily="2" charset="-78"/>
                 <a:cs typeface="Amiri" pitchFamily="2" charset="-78"/>
               </a:rPr>
               <a:t>نَمُوذَجُ الإِجَابَةِ</a:t>
@@ -38794,6 +38996,7 @@
                   <a:srgbClr val="1F2A37"/>
                 </a:solidFill>
                 <a:latin typeface="Amiri" pitchFamily="2" charset="-78"/>
+                <a:ea typeface="Amiri" pitchFamily="2" charset="-78"/>
                 <a:cs typeface="Amiri" pitchFamily="2" charset="-78"/>
               </a:rPr>
               <a:t>الْيَوْمَ أَسْتَيْقِظُ مُبَكِّرًا، ثُمَّ أُصَلِّي الْفَجْرَ مَعَ أَبِي فِي الْمَسْجِدِ أَمَامَ بَيْتِنَا. بَعْدَ ذَلِكَ آكُلُ الْفَطُورَ بِسُرْعَةٍ وَأَذْهَبُ إِلَى الْمَدْرَسَةِ. فِي الصَّفِّ أَجْلِسُ دَائِمًا قُرْبَ النَّافِذَةِ، وَأَسْتَمِعُ إِلَى الْمُعَلِّمِ بِهُدُوءٍ. مَسَاءً أَكْتُبُ وَاجِبِي بِعِنَايَةٍ هُنَا فِي غُرْفَتِي. غَدًا سَأَلْعَبُ مَعَ أَصْدِقَائِي خَلْفَ الْمَدْرَسَةِ.</a:t>
@@ -39290,6 +39493,7 @@
                   <a:srgbClr val="D4AF37"/>
                 </a:solidFill>
                 <a:latin typeface="Amiri" pitchFamily="2" charset="-78"/>
+                <a:ea typeface="Amiri" pitchFamily="2" charset="-78"/>
                 <a:cs typeface="Amiri" pitchFamily="2" charset="-78"/>
               </a:rPr>
               <a:t>م</a:t>
@@ -39610,6 +39814,7 @@
                   <a:srgbClr val="8A6D1E"/>
                 </a:solidFill>
                 <a:latin typeface="Amiri" pitchFamily="2" charset="-78"/>
+                <a:ea typeface="Amiri" pitchFamily="2" charset="-78"/>
                 <a:cs typeface="Amiri" pitchFamily="2" charset="-78"/>
               </a:rPr>
               <a:t>قَيِّمْ عَمَلَكَ</a:t>
@@ -40767,6 +40972,7 @@
                   <a:srgbClr val="D4AF37"/>
                 </a:solidFill>
                 <a:latin typeface="Amiri" pitchFamily="2" charset="-78"/>
+                <a:ea typeface="Amiri" pitchFamily="2" charset="-78"/>
                 <a:cs typeface="Amiri" pitchFamily="2" charset="-78"/>
               </a:rPr>
               <a:t>م</a:t>
@@ -41087,6 +41293,7 @@
                   <a:srgbClr val="8A6D1E"/>
                 </a:solidFill>
                 <a:latin typeface="Amiri" pitchFamily="2" charset="-78"/>
+                <a:ea typeface="Amiri" pitchFamily="2" charset="-78"/>
                 <a:cs typeface="Amiri" pitchFamily="2" charset="-78"/>
               </a:rPr>
               <a:t>خَرِيطَةُ الدَّرْسِ</a:t>
@@ -41401,6 +41608,7 @@
                   <a:srgbClr val="0E7C86"/>
                 </a:solidFill>
                 <a:latin typeface="Amiri" pitchFamily="2" charset="-78"/>
+                <a:ea typeface="Amiri" pitchFamily="2" charset="-78"/>
                 <a:cs typeface="Amiri" pitchFamily="2" charset="-78"/>
               </a:rPr>
               <a:t>اِبْدَأِ الآنَ</a:t>
@@ -41677,6 +41885,7 @@
                   <a:srgbClr val="1B3B6F"/>
                 </a:solidFill>
                 <a:latin typeface="Amiri" pitchFamily="2" charset="-78"/>
+                <a:ea typeface="Amiri" pitchFamily="2" charset="-78"/>
                 <a:cs typeface="Amiri" pitchFamily="2" charset="-78"/>
               </a:rPr>
               <a:t>كَلِمَاتٌ وَقَوَاعِدُ</a:t>
@@ -41953,6 +42162,7 @@
                   <a:srgbClr val="6B4C9A"/>
                 </a:solidFill>
                 <a:latin typeface="Amiri" pitchFamily="2" charset="-78"/>
+                <a:ea typeface="Amiri" pitchFamily="2" charset="-78"/>
                 <a:cs typeface="Amiri" pitchFamily="2" charset="-78"/>
               </a:rPr>
               <a:t>شَاهِدْ</a:t>
@@ -42229,6 +42439,7 @@
                   <a:srgbClr val="2F6FB0"/>
                 </a:solidFill>
                 <a:latin typeface="Amiri" pitchFamily="2" charset="-78"/>
+                <a:ea typeface="Amiri" pitchFamily="2" charset="-78"/>
                 <a:cs typeface="Amiri" pitchFamily="2" charset="-78"/>
               </a:rPr>
               <a:t>مَعًا</a:t>
@@ -42505,6 +42716,7 @@
                   <a:srgbClr val="1E6B52"/>
                 </a:solidFill>
                 <a:latin typeface="Amiri" pitchFamily="2" charset="-78"/>
+                <a:ea typeface="Amiri" pitchFamily="2" charset="-78"/>
                 <a:cs typeface="Amiri" pitchFamily="2" charset="-78"/>
               </a:rPr>
               <a:t>وَحْدَكَ</a:t>
@@ -42781,6 +42993,7 @@
                   <a:srgbClr val="8A6D1E"/>
                 </a:solidFill>
                 <a:latin typeface="Amiri" pitchFamily="2" charset="-78"/>
+                <a:ea typeface="Amiri" pitchFamily="2" charset="-78"/>
                 <a:cs typeface="Amiri" pitchFamily="2" charset="-78"/>
               </a:rPr>
               <a:t>قَيِّمْ عَمَلَكَ</a:t>
@@ -43057,6 +43270,7 @@
                   <a:srgbClr val="C45A3C"/>
                 </a:solidFill>
                 <a:latin typeface="Amiri" pitchFamily="2" charset="-78"/>
+                <a:ea typeface="Amiri" pitchFamily="2" charset="-78"/>
                 <a:cs typeface="Amiri" pitchFamily="2" charset="-78"/>
               </a:rPr>
               <a:t>اِسْتَعِدَّ</a:t>
@@ -43300,6 +43514,7 @@
                   <a:srgbClr val="D4AF37"/>
                 </a:solidFill>
                 <a:latin typeface="Amiri" pitchFamily="2" charset="-78"/>
+                <a:ea typeface="Amiri" pitchFamily="2" charset="-78"/>
                 <a:cs typeface="Amiri" pitchFamily="2" charset="-78"/>
               </a:rPr>
               <a:t>م</a:t>
@@ -43620,6 +43835,7 @@
                   <a:srgbClr val="8A6D1E"/>
                 </a:solidFill>
                 <a:latin typeface="Amiri" pitchFamily="2" charset="-78"/>
+                <a:ea typeface="Amiri" pitchFamily="2" charset="-78"/>
                 <a:cs typeface="Amiri" pitchFamily="2" charset="-78"/>
               </a:rPr>
               <a:t>تَذْكِرَةُ الخُرُوجِ</a:t>
@@ -43831,6 +44047,7 @@
                   <a:srgbClr val="1F2A37"/>
                 </a:solidFill>
                 <a:latin typeface="Amiri" pitchFamily="2" charset="-78"/>
+                <a:ea typeface="Amiri" pitchFamily="2" charset="-78"/>
                 <a:cs typeface="Amiri" pitchFamily="2" charset="-78"/>
               </a:rPr>
               <a:t>سَنَبْدَأُ قَرِيبًا.</a:t>
@@ -43932,6 +44149,7 @@
                   <a:srgbClr val="1F2A37"/>
                 </a:solidFill>
                 <a:latin typeface="Amiri" pitchFamily="2" charset="-78"/>
+                <a:ea typeface="Amiri" pitchFamily="2" charset="-78"/>
                 <a:cs typeface="Amiri" pitchFamily="2" charset="-78"/>
               </a:rPr>
               <a:t>قَرِيبًا</a:t>
@@ -44033,6 +44251,7 @@
                   <a:srgbClr val="1F2A37"/>
                 </a:solidFill>
                 <a:latin typeface="Amiri" pitchFamily="2" charset="-78"/>
+                <a:ea typeface="Amiri" pitchFamily="2" charset="-78"/>
                 <a:cs typeface="Amiri" pitchFamily="2" charset="-78"/>
               </a:rPr>
               <a:t>سَنَبْدَأُ</a:t>
@@ -44134,6 +44353,7 @@
                   <a:srgbClr val="1F2A37"/>
                 </a:solidFill>
                 <a:latin typeface="Amiri" pitchFamily="2" charset="-78"/>
+                <a:ea typeface="Amiri" pitchFamily="2" charset="-78"/>
                 <a:cs typeface="Amiri" pitchFamily="2" charset="-78"/>
               </a:rPr>
               <a:t>نَحْنُ</a:t>
@@ -44307,6 +44527,7 @@
                   <a:srgbClr val="1F2A37"/>
                 </a:solidFill>
                 <a:latin typeface="Amiri" pitchFamily="2" charset="-78"/>
+                <a:ea typeface="Amiri" pitchFamily="2" charset="-78"/>
                 <a:cs typeface="Amiri" pitchFamily="2" charset="-78"/>
               </a:rPr>
               <a:t>الْمِفْتَاحُ تَحْتَ الْكِتَابِ.</a:t>
@@ -44408,6 +44629,7 @@
                   <a:srgbClr val="1F2A37"/>
                 </a:solidFill>
                 <a:latin typeface="Amiri" pitchFamily="2" charset="-78"/>
+                <a:ea typeface="Amiri" pitchFamily="2" charset="-78"/>
                 <a:cs typeface="Amiri" pitchFamily="2" charset="-78"/>
               </a:rPr>
               <a:t>الْمِفْتَاحُ</a:t>
@@ -44509,6 +44731,7 @@
                   <a:srgbClr val="1F2A37"/>
                 </a:solidFill>
                 <a:latin typeface="Amiri" pitchFamily="2" charset="-78"/>
+                <a:ea typeface="Amiri" pitchFamily="2" charset="-78"/>
                 <a:cs typeface="Amiri" pitchFamily="2" charset="-78"/>
               </a:rPr>
               <a:t>تَحْتَ الْكِتَابِ</a:t>
@@ -44610,6 +44833,7 @@
                   <a:srgbClr val="1F2A37"/>
                 </a:solidFill>
                 <a:latin typeface="Amiri" pitchFamily="2" charset="-78"/>
+                <a:ea typeface="Amiri" pitchFamily="2" charset="-78"/>
                 <a:cs typeface="Amiri" pitchFamily="2" charset="-78"/>
               </a:rPr>
               <a:t>الْكِتَابِ فقط</a:t>
@@ -44783,6 +45007,7 @@
                   <a:srgbClr val="1F2A37"/>
                 </a:solidFill>
                 <a:latin typeface="Amiri" pitchFamily="2" charset="-78"/>
+                <a:ea typeface="Amiri" pitchFamily="2" charset="-78"/>
                 <a:cs typeface="Amiri" pitchFamily="2" charset="-78"/>
               </a:rPr>
               <a:t>تَكَلَّمَتْ بِوُضُوحٍ.</a:t>
@@ -44884,6 +45109,7 @@
                   <a:srgbClr val="1F2A37"/>
                 </a:solidFill>
                 <a:latin typeface="Amiri" pitchFamily="2" charset="-78"/>
+                <a:ea typeface="Amiri" pitchFamily="2" charset="-78"/>
                 <a:cs typeface="Amiri" pitchFamily="2" charset="-78"/>
               </a:rPr>
               <a:t>بِوُضُوحٍ</a:t>
@@ -44985,6 +45211,7 @@
                   <a:srgbClr val="1F2A37"/>
                 </a:solidFill>
                 <a:latin typeface="Amiri" pitchFamily="2" charset="-78"/>
+                <a:ea typeface="Amiri" pitchFamily="2" charset="-78"/>
                 <a:cs typeface="Amiri" pitchFamily="2" charset="-78"/>
               </a:rPr>
               <a:t>تَكَلَّمَتْ</a:t>
@@ -45086,6 +45313,7 @@
                   <a:srgbClr val="1F2A37"/>
                 </a:solidFill>
                 <a:latin typeface="Amiri" pitchFamily="2" charset="-78"/>
+                <a:ea typeface="Amiri" pitchFamily="2" charset="-78"/>
                 <a:cs typeface="Amiri" pitchFamily="2" charset="-78"/>
               </a:rPr>
               <a:t>هِيَ</a:t>
@@ -45329,6 +45557,7 @@
                   <a:srgbClr val="D4AF37"/>
                 </a:solidFill>
                 <a:latin typeface="Amiri" pitchFamily="2" charset="-78"/>
+                <a:ea typeface="Amiri" pitchFamily="2" charset="-78"/>
                 <a:cs typeface="Amiri" pitchFamily="2" charset="-78"/>
               </a:rPr>
               <a:t>م</a:t>
@@ -45649,6 +45878,7 @@
                   <a:srgbClr val="8A6D1E"/>
                 </a:solidFill>
                 <a:latin typeface="Amiri" pitchFamily="2" charset="-78"/>
+                <a:ea typeface="Amiri" pitchFamily="2" charset="-78"/>
                 <a:cs typeface="Amiri" pitchFamily="2" charset="-78"/>
               </a:rPr>
               <a:t>إِجَابَاتُ تَذْكِرَةِ الخُرُوجِ</a:t>
@@ -45860,6 +46090,7 @@
                   <a:srgbClr val="1F2A37"/>
                 </a:solidFill>
                 <a:latin typeface="Amiri" pitchFamily="2" charset="-78"/>
+                <a:ea typeface="Amiri" pitchFamily="2" charset="-78"/>
                 <a:cs typeface="Amiri" pitchFamily="2" charset="-78"/>
               </a:rPr>
               <a:t>سَنَبْدَأُ قَرِيبًا.</a:t>
@@ -45988,6 +46219,7 @@
                   <a:srgbClr val="1F2A37"/>
                 </a:solidFill>
                 <a:latin typeface="Amiri" pitchFamily="2" charset="-78"/>
+                <a:ea typeface="Amiri" pitchFamily="2" charset="-78"/>
                 <a:cs typeface="Amiri" pitchFamily="2" charset="-78"/>
               </a:rPr>
               <a:t>قَرِيبًا</a:t>
@@ -46089,6 +46321,7 @@
                   <a:srgbClr val="9AA1AB"/>
                 </a:solidFill>
                 <a:latin typeface="Amiri" pitchFamily="2" charset="-78"/>
+                <a:ea typeface="Amiri" pitchFamily="2" charset="-78"/>
                 <a:cs typeface="Amiri" pitchFamily="2" charset="-78"/>
               </a:rPr>
               <a:t>سَنَبْدَأُ</a:t>
@@ -46190,6 +46423,7 @@
                   <a:srgbClr val="9AA1AB"/>
                 </a:solidFill>
                 <a:latin typeface="Amiri" pitchFamily="2" charset="-78"/>
+                <a:ea typeface="Amiri" pitchFamily="2" charset="-78"/>
                 <a:cs typeface="Amiri" pitchFamily="2" charset="-78"/>
               </a:rPr>
               <a:t>نَحْنُ</a:t>
@@ -46401,6 +46635,7 @@
                   <a:srgbClr val="1F2A37"/>
                 </a:solidFill>
                 <a:latin typeface="Amiri" pitchFamily="2" charset="-78"/>
+                <a:ea typeface="Amiri" pitchFamily="2" charset="-78"/>
                 <a:cs typeface="Amiri" pitchFamily="2" charset="-78"/>
               </a:rPr>
               <a:t>الْمِفْتَاحُ تَحْتَ الْكِتَابِ.</a:t>
@@ -46502,6 +46737,7 @@
                   <a:srgbClr val="9AA1AB"/>
                 </a:solidFill>
                 <a:latin typeface="Amiri" pitchFamily="2" charset="-78"/>
+                <a:ea typeface="Amiri" pitchFamily="2" charset="-78"/>
                 <a:cs typeface="Amiri" pitchFamily="2" charset="-78"/>
               </a:rPr>
               <a:t>الْمِفْتَاحُ</a:t>
@@ -46630,6 +46866,7 @@
                   <a:srgbClr val="1F2A37"/>
                 </a:solidFill>
                 <a:latin typeface="Amiri" pitchFamily="2" charset="-78"/>
+                <a:ea typeface="Amiri" pitchFamily="2" charset="-78"/>
                 <a:cs typeface="Amiri" pitchFamily="2" charset="-78"/>
               </a:rPr>
               <a:t>تَحْتَ الْكِتَابِ</a:t>
@@ -46731,6 +46968,7 @@
                   <a:srgbClr val="9AA1AB"/>
                 </a:solidFill>
                 <a:latin typeface="Amiri" pitchFamily="2" charset="-78"/>
+                <a:ea typeface="Amiri" pitchFamily="2" charset="-78"/>
                 <a:cs typeface="Amiri" pitchFamily="2" charset="-78"/>
               </a:rPr>
               <a:t>الْكِتَابِ فقط</a:t>
@@ -46942,6 +47180,7 @@
                   <a:srgbClr val="1F2A37"/>
                 </a:solidFill>
                 <a:latin typeface="Amiri" pitchFamily="2" charset="-78"/>
+                <a:ea typeface="Amiri" pitchFamily="2" charset="-78"/>
                 <a:cs typeface="Amiri" pitchFamily="2" charset="-78"/>
               </a:rPr>
               <a:t>تَكَلَّمَتْ بِوُضُوحٍ.</a:t>
@@ -47070,6 +47309,7 @@
                   <a:srgbClr val="1F2A37"/>
                 </a:solidFill>
                 <a:latin typeface="Amiri" pitchFamily="2" charset="-78"/>
+                <a:ea typeface="Amiri" pitchFamily="2" charset="-78"/>
                 <a:cs typeface="Amiri" pitchFamily="2" charset="-78"/>
               </a:rPr>
               <a:t>بِوُضُوحٍ</a:t>
@@ -47171,6 +47411,7 @@
                   <a:srgbClr val="9AA1AB"/>
                 </a:solidFill>
                 <a:latin typeface="Amiri" pitchFamily="2" charset="-78"/>
+                <a:ea typeface="Amiri" pitchFamily="2" charset="-78"/>
                 <a:cs typeface="Amiri" pitchFamily="2" charset="-78"/>
               </a:rPr>
               <a:t>تَكَلَّمَتْ</a:t>
@@ -47272,6 +47513,7 @@
                   <a:srgbClr val="9AA1AB"/>
                 </a:solidFill>
                 <a:latin typeface="Amiri" pitchFamily="2" charset="-78"/>
+                <a:ea typeface="Amiri" pitchFamily="2" charset="-78"/>
                 <a:cs typeface="Amiri" pitchFamily="2" charset="-78"/>
               </a:rPr>
               <a:t>هِيَ</a:t>
@@ -47553,6 +47795,7 @@
                   <a:srgbClr val="D4AF37"/>
                 </a:solidFill>
                 <a:latin typeface="Amiri" pitchFamily="2" charset="-78"/>
+                <a:ea typeface="Amiri" pitchFamily="2" charset="-78"/>
                 <a:cs typeface="Amiri" pitchFamily="2" charset="-78"/>
               </a:rPr>
               <a:t>م</a:t>
@@ -47873,6 +48116,7 @@
                   <a:srgbClr val="8A6D1E"/>
                 </a:solidFill>
                 <a:latin typeface="Amiri" pitchFamily="2" charset="-78"/>
+                <a:ea typeface="Amiri" pitchFamily="2" charset="-78"/>
                 <a:cs typeface="Amiri" pitchFamily="2" charset="-78"/>
               </a:rPr>
               <a:t>التَّحْضِيرُ لِلدَّرْسِ القَادِمِ</a:t>
@@ -48086,6 +48330,7 @@
                   <a:srgbClr val="1B3B6F"/>
                 </a:solidFill>
                 <a:latin typeface="Amiri" pitchFamily="2" charset="-78"/>
+                <a:ea typeface="Amiri" pitchFamily="2" charset="-78"/>
                 <a:cs typeface="Amiri" pitchFamily="2" charset="-78"/>
               </a:rPr>
               <a:t>الْأُسْبُوعَ الْمَاضِيَ</a:t>
@@ -48175,6 +48420,7 @@
                   <a:srgbClr val="1B3B6F"/>
                 </a:solidFill>
                 <a:latin typeface="Amiri" pitchFamily="2" charset="-78"/>
+                <a:ea typeface="Amiri" pitchFamily="2" charset="-78"/>
                 <a:cs typeface="Amiri" pitchFamily="2" charset="-78"/>
               </a:rPr>
               <a:t>الْآنَ</a:t>
@@ -48264,6 +48510,7 @@
                   <a:srgbClr val="1B3B6F"/>
                 </a:solidFill>
                 <a:latin typeface="Amiri" pitchFamily="2" charset="-78"/>
+                <a:ea typeface="Amiri" pitchFamily="2" charset="-78"/>
                 <a:cs typeface="Amiri" pitchFamily="2" charset="-78"/>
               </a:rPr>
               <a:t>الْأُسْبُوعَ الْقَادِمَ</a:t>
@@ -48353,6 +48600,7 @@
                   <a:srgbClr val="1B3B6F"/>
                 </a:solidFill>
                 <a:latin typeface="Amiri" pitchFamily="2" charset="-78"/>
+                <a:ea typeface="Amiri" pitchFamily="2" charset="-78"/>
                 <a:cs typeface="Amiri" pitchFamily="2" charset="-78"/>
               </a:rPr>
               <a:t>سَـ / سَوْفَ</a:t>
@@ -48399,11 +48647,12 @@
               <a:buNone/>
             </a:pPr>
             <a:r>
-              <a:rPr lang="en-US" sz="1000" i="1" dirty="0">
+              <a:rPr lang="ar-SA" sz="1000" i="1" dirty="0">
                 <a:solidFill>
                   <a:srgbClr val="5A6472"/>
                 </a:solidFill>
                 <a:latin typeface="Calibri" pitchFamily="34" charset="0"/>
+                <a:ea typeface="Amiri" pitchFamily="2" charset="-78"/>
                 <a:cs typeface="Amiri" pitchFamily="2" charset="-78"/>
               </a:rPr>
               <a:t>  سَأَدْرُسُ</a:t>
@@ -48442,6 +48691,7 @@
                   <a:srgbClr val="1B3B6F"/>
                 </a:solidFill>
                 <a:latin typeface="Amiri" pitchFamily="2" charset="-78"/>
+                <a:ea typeface="Amiri" pitchFamily="2" charset="-78"/>
                 <a:cs typeface="Amiri" pitchFamily="2" charset="-78"/>
               </a:rPr>
               <a:t>كُلَّ يَوْمٍ</a:t>
@@ -48610,6 +48860,7 @@
                   <a:srgbClr val="1B3B6F"/>
                 </a:solidFill>
                 <a:latin typeface="Amiri" pitchFamily="2" charset="-78"/>
+                <a:ea typeface="Amiri" pitchFamily="2" charset="-78"/>
                 <a:cs typeface="Amiri" pitchFamily="2" charset="-78"/>
               </a:rPr>
               <a:t>الْأُسْبُوعَ الْمَاضِيَ دَرَسْتُ — الْآنَ ______</a:t>
@@ -49279,6 +49530,7 @@
                   <a:srgbClr val="FFFFFF"/>
                 </a:solidFill>
                 <a:latin typeface="Amiri" pitchFamily="2" charset="-78"/>
+                <a:ea typeface="Amiri" pitchFamily="2" charset="-78"/>
                 <a:cs typeface="Amiri" pitchFamily="2" charset="-78"/>
               </a:rPr>
               <a:t>أَحْسَنْتُمْ! إِلَى اللِّقَاءِ</a:t>
@@ -49431,6 +49683,7 @@
                   <a:srgbClr val="D4AF37"/>
                 </a:solidFill>
                 <a:latin typeface="Amiri" pitchFamily="2" charset="-78"/>
+                <a:ea typeface="Amiri" pitchFamily="2" charset="-78"/>
                 <a:cs typeface="Amiri" pitchFamily="2" charset="-78"/>
               </a:rPr>
               <a:t>الظُّرُوفُ وَالْأُطُرُ الزَّمَنِيَّةُ</a:t>
@@ -49564,6 +49817,7 @@
                   <a:srgbClr val="D4AF37"/>
                 </a:solidFill>
                 <a:latin typeface="Amiri" pitchFamily="2" charset="-78"/>
+                <a:ea typeface="Amiri" pitchFamily="2" charset="-78"/>
                 <a:cs typeface="Amiri" pitchFamily="2" charset="-78"/>
               </a:rPr>
               <a:t>م</a:t>
@@ -49884,6 +50138,7 @@
                   <a:srgbClr val="8A6D1E"/>
                 </a:solidFill>
                 <a:latin typeface="Amiri" pitchFamily="2" charset="-78"/>
+                <a:ea typeface="Amiri" pitchFamily="2" charset="-78"/>
                 <a:cs typeface="Amiri" pitchFamily="2" charset="-78"/>
               </a:rPr>
               <a:t>اِبْدَأِ الآنَ</a:t>
@@ -50095,6 +50350,7 @@
                   <a:srgbClr val="1F2A37"/>
                 </a:solidFill>
                 <a:latin typeface="Amiri" pitchFamily="2" charset="-78"/>
+                <a:ea typeface="Amiri" pitchFamily="2" charset="-78"/>
                 <a:cs typeface="Amiri" pitchFamily="2" charset="-78"/>
               </a:rPr>
               <a:t>سَأَزُورُ جَدَّتِي غَدًا.</a:t>
@@ -50196,6 +50452,7 @@
                   <a:srgbClr val="1F2A37"/>
                 </a:solidFill>
                 <a:latin typeface="Amiri" pitchFamily="2" charset="-78"/>
+                <a:ea typeface="Amiri" pitchFamily="2" charset="-78"/>
                 <a:cs typeface="Amiri" pitchFamily="2" charset="-78"/>
               </a:rPr>
               <a:t>سَأَزُورُ</a:t>
@@ -50297,6 +50554,7 @@
                   <a:srgbClr val="1F2A37"/>
                 </a:solidFill>
                 <a:latin typeface="Amiri" pitchFamily="2" charset="-78"/>
+                <a:ea typeface="Amiri" pitchFamily="2" charset="-78"/>
                 <a:cs typeface="Amiri" pitchFamily="2" charset="-78"/>
               </a:rPr>
               <a:t>غَدًا</a:t>
@@ -50398,6 +50656,7 @@
                   <a:srgbClr val="1F2A37"/>
                 </a:solidFill>
                 <a:latin typeface="Amiri" pitchFamily="2" charset="-78"/>
+                <a:ea typeface="Amiri" pitchFamily="2" charset="-78"/>
                 <a:cs typeface="Amiri" pitchFamily="2" charset="-78"/>
               </a:rPr>
               <a:t>جَدَّتِي</a:t>
@@ -50634,6 +50893,7 @@
                   <a:srgbClr val="1F2A37"/>
                 </a:solidFill>
                 <a:latin typeface="Amiri" pitchFamily="2" charset="-78"/>
+                <a:ea typeface="Amiri" pitchFamily="2" charset="-78"/>
                 <a:cs typeface="Amiri" pitchFamily="2" charset="-78"/>
               </a:rPr>
               <a:t>هُنَا</a:t>
@@ -50735,6 +50995,7 @@
                   <a:srgbClr val="1F2A37"/>
                 </a:solidFill>
                 <a:latin typeface="Amiri" pitchFamily="2" charset="-78"/>
+                <a:ea typeface="Amiri" pitchFamily="2" charset="-78"/>
                 <a:cs typeface="Amiri" pitchFamily="2" charset="-78"/>
               </a:rPr>
               <a:t>هُنَاكَ</a:t>
@@ -50836,6 +51097,7 @@
                   <a:srgbClr val="1F2A37"/>
                 </a:solidFill>
                 <a:latin typeface="Amiri" pitchFamily="2" charset="-78"/>
+                <a:ea typeface="Amiri" pitchFamily="2" charset="-78"/>
                 <a:cs typeface="Amiri" pitchFamily="2" charset="-78"/>
               </a:rPr>
               <a:t>تَحْتَ</a:t>
@@ -51072,6 +51334,7 @@
                   <a:srgbClr val="1F2A37"/>
                 </a:solidFill>
                 <a:latin typeface="Amiri" pitchFamily="2" charset="-78"/>
+                <a:ea typeface="Amiri" pitchFamily="2" charset="-78"/>
                 <a:cs typeface="Amiri" pitchFamily="2" charset="-78"/>
               </a:rPr>
               <a:t>الْقِطَارُ سَرِيعٌ.</a:t>
@@ -51173,6 +51436,7 @@
                   <a:srgbClr val="1F2A37"/>
                 </a:solidFill>
                 <a:latin typeface="Amiri" pitchFamily="2" charset="-78"/>
+                <a:ea typeface="Amiri" pitchFamily="2" charset="-78"/>
                 <a:cs typeface="Amiri" pitchFamily="2" charset="-78"/>
               </a:rPr>
               <a:t>يَسِيرُ الْقِطَارُ سَرِيعَةٌ.</a:t>
@@ -51274,6 +51538,7 @@
                   <a:srgbClr val="1F2A37"/>
                 </a:solidFill>
                 <a:latin typeface="Amiri" pitchFamily="2" charset="-78"/>
+                <a:ea typeface="Amiri" pitchFamily="2" charset="-78"/>
                 <a:cs typeface="Amiri" pitchFamily="2" charset="-78"/>
               </a:rPr>
               <a:t>يَسِيرُ الْقِطَارُ سَرِيعًا.</a:t>
@@ -51447,6 +51712,7 @@
                   <a:srgbClr val="1F2A37"/>
                 </a:solidFill>
                 <a:latin typeface="Amiri" pitchFamily="2" charset="-78"/>
+                <a:ea typeface="Amiri" pitchFamily="2" charset="-78"/>
                 <a:cs typeface="Amiri" pitchFamily="2" charset="-78"/>
               </a:rPr>
               <a:t>الْكِتَابُ ___ الطَّاوِلَةِ.</a:t>
@@ -51548,6 +51814,7 @@
                   <a:srgbClr val="1F2A37"/>
                 </a:solidFill>
                 <a:latin typeface="Amiri" pitchFamily="2" charset="-78"/>
+                <a:ea typeface="Amiri" pitchFamily="2" charset="-78"/>
                 <a:cs typeface="Amiri" pitchFamily="2" charset="-78"/>
               </a:rPr>
               <a:t>غَدًا</a:t>
@@ -51649,6 +51916,7 @@
                   <a:srgbClr val="1F2A37"/>
                 </a:solidFill>
                 <a:latin typeface="Amiri" pitchFamily="2" charset="-78"/>
+                <a:ea typeface="Amiri" pitchFamily="2" charset="-78"/>
                 <a:cs typeface="Amiri" pitchFamily="2" charset="-78"/>
               </a:rPr>
               <a:t>جَيِّدًا</a:t>
@@ -51750,6 +52018,7 @@
                   <a:srgbClr val="1F2A37"/>
                 </a:solidFill>
                 <a:latin typeface="Amiri" pitchFamily="2" charset="-78"/>
+                <a:ea typeface="Amiri" pitchFamily="2" charset="-78"/>
                 <a:cs typeface="Amiri" pitchFamily="2" charset="-78"/>
               </a:rPr>
               <a:t>فَوْقَ</a:t>
@@ -51986,6 +52255,7 @@
                   <a:srgbClr val="1F2A37"/>
                 </a:solidFill>
                 <a:latin typeface="Amiri" pitchFamily="2" charset="-78"/>
+                <a:ea typeface="Amiri" pitchFamily="2" charset="-78"/>
                 <a:cs typeface="Amiri" pitchFamily="2" charset="-78"/>
               </a:rPr>
               <a:t>هَذَا كِتَابٌ جَيِّدٌ.</a:t>
@@ -52087,6 +52357,7 @@
                   <a:srgbClr val="1F2A37"/>
                 </a:solidFill>
                 <a:latin typeface="Amiri" pitchFamily="2" charset="-78"/>
+                <a:ea typeface="Amiri" pitchFamily="2" charset="-78"/>
                 <a:cs typeface="Amiri" pitchFamily="2" charset="-78"/>
               </a:rPr>
               <a:t>هُوَ يَكْتُبُ جَيِّدًا.</a:t>
@@ -52188,6 +52459,7 @@
                   <a:srgbClr val="1F2A37"/>
                 </a:solidFill>
                 <a:latin typeface="Amiri" pitchFamily="2" charset="-78"/>
+                <a:ea typeface="Amiri" pitchFamily="2" charset="-78"/>
                 <a:cs typeface="Amiri" pitchFamily="2" charset="-78"/>
               </a:rPr>
               <a:t>تَحَدَّثَ جَيِّدًا.</a:t>
@@ -52523,6 +52795,7 @@
                   <a:srgbClr val="D4AF37"/>
                 </a:solidFill>
                 <a:latin typeface="Amiri" pitchFamily="2" charset="-78"/>
+                <a:ea typeface="Amiri" pitchFamily="2" charset="-78"/>
                 <a:cs typeface="Amiri" pitchFamily="2" charset="-78"/>
               </a:rPr>
               <a:t>م</a:t>
@@ -52843,6 +53116,7 @@
                   <a:srgbClr val="8A6D1E"/>
                 </a:solidFill>
                 <a:latin typeface="Amiri" pitchFamily="2" charset="-78"/>
+                <a:ea typeface="Amiri" pitchFamily="2" charset="-78"/>
                 <a:cs typeface="Amiri" pitchFamily="2" charset="-78"/>
               </a:rPr>
               <a:t>الإِجَابَاتُ وَالتَّعْلِيلُ</a:t>
@@ -53054,6 +53328,7 @@
                   <a:srgbClr val="1F2A37"/>
                 </a:solidFill>
                 <a:latin typeface="Amiri" pitchFamily="2" charset="-78"/>
+                <a:ea typeface="Amiri" pitchFamily="2" charset="-78"/>
                 <a:cs typeface="Amiri" pitchFamily="2" charset="-78"/>
               </a:rPr>
               <a:t>سَأَزُورُ جَدَّتِي غَدًا.</a:t>
@@ -53155,6 +53430,7 @@
                   <a:srgbClr val="9AA1AB"/>
                 </a:solidFill>
                 <a:latin typeface="Amiri" pitchFamily="2" charset="-78"/>
+                <a:ea typeface="Amiri" pitchFamily="2" charset="-78"/>
                 <a:cs typeface="Amiri" pitchFamily="2" charset="-78"/>
               </a:rPr>
               <a:t>سَأَزُورُ</a:t>
@@ -53283,6 +53559,7 @@
                   <a:srgbClr val="1F2A37"/>
                 </a:solidFill>
                 <a:latin typeface="Amiri" pitchFamily="2" charset="-78"/>
+                <a:ea typeface="Amiri" pitchFamily="2" charset="-78"/>
                 <a:cs typeface="Amiri" pitchFamily="2" charset="-78"/>
               </a:rPr>
               <a:t>غَدًا</a:t>
@@ -53384,6 +53661,7 @@
                   <a:srgbClr val="9AA1AB"/>
                 </a:solidFill>
                 <a:latin typeface="Amiri" pitchFamily="2" charset="-78"/>
+                <a:ea typeface="Amiri" pitchFamily="2" charset="-78"/>
                 <a:cs typeface="Amiri" pitchFamily="2" charset="-78"/>
               </a:rPr>
               <a:t>جَدَّتِي</a:t>
@@ -53685,6 +53963,7 @@
                   <a:srgbClr val="1F2A37"/>
                 </a:solidFill>
                 <a:latin typeface="Amiri" pitchFamily="2" charset="-78"/>
+                <a:ea typeface="Amiri" pitchFamily="2" charset="-78"/>
                 <a:cs typeface="Amiri" pitchFamily="2" charset="-78"/>
               </a:rPr>
               <a:t>هُنَا</a:t>
@@ -53786,6 +54065,7 @@
                   <a:srgbClr val="9AA1AB"/>
                 </a:solidFill>
                 <a:latin typeface="Amiri" pitchFamily="2" charset="-78"/>
+                <a:ea typeface="Amiri" pitchFamily="2" charset="-78"/>
                 <a:cs typeface="Amiri" pitchFamily="2" charset="-78"/>
               </a:rPr>
               <a:t>هُنَاكَ</a:t>
@@ -53887,6 +54167,7 @@
                   <a:srgbClr val="9AA1AB"/>
                 </a:solidFill>
                 <a:latin typeface="Amiri" pitchFamily="2" charset="-78"/>
+                <a:ea typeface="Amiri" pitchFamily="2" charset="-78"/>
                 <a:cs typeface="Amiri" pitchFamily="2" charset="-78"/>
               </a:rPr>
               <a:t>تَحْتَ</a:t>
@@ -54161,6 +54442,7 @@
                   <a:srgbClr val="9AA1AB"/>
                 </a:solidFill>
                 <a:latin typeface="Amiri" pitchFamily="2" charset="-78"/>
+                <a:ea typeface="Amiri" pitchFamily="2" charset="-78"/>
                 <a:cs typeface="Amiri" pitchFamily="2" charset="-78"/>
               </a:rPr>
               <a:t>الْقِطَارُ سَرِيعٌ.</a:t>
@@ -54262,6 +54544,7 @@
                   <a:srgbClr val="9AA1AB"/>
                 </a:solidFill>
                 <a:latin typeface="Amiri" pitchFamily="2" charset="-78"/>
+                <a:ea typeface="Amiri" pitchFamily="2" charset="-78"/>
                 <a:cs typeface="Amiri" pitchFamily="2" charset="-78"/>
               </a:rPr>
               <a:t>يَسِيرُ الْقِطَارُ سَرِيعَةٌ.</a:t>
@@ -54390,6 +54673,7 @@
                   <a:srgbClr val="1F2A37"/>
                 </a:solidFill>
                 <a:latin typeface="Amiri" pitchFamily="2" charset="-78"/>
+                <a:ea typeface="Amiri" pitchFamily="2" charset="-78"/>
                 <a:cs typeface="Amiri" pitchFamily="2" charset="-78"/>
               </a:rPr>
               <a:t>يَسِيرُ الْقِطَارُ سَرِيعًا.</a:t>
@@ -54601,6 +54885,7 @@
                   <a:srgbClr val="1F2A37"/>
                 </a:solidFill>
                 <a:latin typeface="Amiri" pitchFamily="2" charset="-78"/>
+                <a:ea typeface="Amiri" pitchFamily="2" charset="-78"/>
                 <a:cs typeface="Amiri" pitchFamily="2" charset="-78"/>
               </a:rPr>
               <a:t>الْكِتَابُ ___ الطَّاوِلَةِ.</a:t>
@@ -54702,6 +54987,7 @@
                   <a:srgbClr val="9AA1AB"/>
                 </a:solidFill>
                 <a:latin typeface="Amiri" pitchFamily="2" charset="-78"/>
+                <a:ea typeface="Amiri" pitchFamily="2" charset="-78"/>
                 <a:cs typeface="Amiri" pitchFamily="2" charset="-78"/>
               </a:rPr>
               <a:t>غَدًا</a:t>
@@ -54803,6 +55089,7 @@
                   <a:srgbClr val="9AA1AB"/>
                 </a:solidFill>
                 <a:latin typeface="Amiri" pitchFamily="2" charset="-78"/>
+                <a:ea typeface="Amiri" pitchFamily="2" charset="-78"/>
                 <a:cs typeface="Amiri" pitchFamily="2" charset="-78"/>
               </a:rPr>
               <a:t>جَيِّدًا</a:t>
@@ -54931,6 +55218,7 @@
                   <a:srgbClr val="1F2A37"/>
                 </a:solidFill>
                 <a:latin typeface="Amiri" pitchFamily="2" charset="-78"/>
+                <a:ea typeface="Amiri" pitchFamily="2" charset="-78"/>
                 <a:cs typeface="Amiri" pitchFamily="2" charset="-78"/>
               </a:rPr>
               <a:t>فَوْقَ</a:t>
@@ -55232,6 +55520,7 @@
                   <a:srgbClr val="1F2A37"/>
                 </a:solidFill>
                 <a:latin typeface="Amiri" pitchFamily="2" charset="-78"/>
+                <a:ea typeface="Amiri" pitchFamily="2" charset="-78"/>
                 <a:cs typeface="Amiri" pitchFamily="2" charset="-78"/>
               </a:rPr>
               <a:t>هَذَا كِتَابٌ جَيِّدٌ.</a:t>
@@ -55333,6 +55622,7 @@
                   <a:srgbClr val="9AA1AB"/>
                 </a:solidFill>
                 <a:latin typeface="Amiri" pitchFamily="2" charset="-78"/>
+                <a:ea typeface="Amiri" pitchFamily="2" charset="-78"/>
                 <a:cs typeface="Amiri" pitchFamily="2" charset="-78"/>
               </a:rPr>
               <a:t>هُوَ يَكْتُبُ جَيِّدًا.</a:t>
@@ -55434,6 +55724,7 @@
                   <a:srgbClr val="9AA1AB"/>
                 </a:solidFill>
                 <a:latin typeface="Amiri" pitchFamily="2" charset="-78"/>
+                <a:ea typeface="Amiri" pitchFamily="2" charset="-78"/>
                 <a:cs typeface="Amiri" pitchFamily="2" charset="-78"/>
               </a:rPr>
               <a:t>تَحَدَّثَ جَيِّدًا.</a:t>
@@ -55620,6 +55911,7 @@
                   <a:srgbClr val="0E7C86"/>
                 </a:solidFill>
                 <a:latin typeface="Amiri" pitchFamily="2" charset="-78"/>
+                <a:ea typeface="Amiri" pitchFamily="2" charset="-78"/>
                 <a:cs typeface="Amiri" pitchFamily="2" charset="-78"/>
               </a:rPr>
               <a:t>غَدًا</a:t>
@@ -55633,6 +55925,7 @@
                   <a:srgbClr val="1B3B6F"/>
                 </a:solidFill>
                 <a:latin typeface="Amiri" pitchFamily="2" charset="-78"/>
+                <a:ea typeface="Amiri" pitchFamily="2" charset="-78"/>
                 <a:cs typeface="Amiri" pitchFamily="2" charset="-78"/>
               </a:rPr>
               <a:t> أَدْرُسُ </a:t>
@@ -55646,6 +55939,7 @@
                   <a:srgbClr val="D6336C"/>
                 </a:solidFill>
                 <a:latin typeface="Amiri" pitchFamily="2" charset="-78"/>
+                <a:ea typeface="Amiri" pitchFamily="2" charset="-78"/>
                 <a:cs typeface="Amiri" pitchFamily="2" charset="-78"/>
               </a:rPr>
               <a:t>هُنَا</a:t>
@@ -55672,6 +55966,7 @@
                   <a:srgbClr val="0E7C86"/>
                 </a:solidFill>
                 <a:latin typeface="Amiri" pitchFamily="2" charset="-78"/>
+                <a:ea typeface="Amiri" pitchFamily="2" charset="-78"/>
                 <a:cs typeface="Amiri" pitchFamily="2" charset="-78"/>
               </a:rPr>
               <a:t>جَيِّدًا</a:t>
@@ -55805,6 +56100,7 @@
                   <a:srgbClr val="D4AF37"/>
                 </a:solidFill>
                 <a:latin typeface="Amiri" pitchFamily="2" charset="-78"/>
+                <a:ea typeface="Amiri" pitchFamily="2" charset="-78"/>
                 <a:cs typeface="Amiri" pitchFamily="2" charset="-78"/>
               </a:rPr>
               <a:t>م</a:t>
@@ -56125,6 +56421,7 @@
                   <a:srgbClr val="8A6D1E"/>
                 </a:solidFill>
                 <a:latin typeface="Amiri" pitchFamily="2" charset="-78"/>
+                <a:ea typeface="Amiri" pitchFamily="2" charset="-78"/>
                 <a:cs typeface="Amiri" pitchFamily="2" charset="-78"/>
               </a:rPr>
               <a:t>الأَهْدَافُ وَمَعَايِيرُ النَّجَاحِ</a:t>
@@ -56273,6 +56570,7 @@
                   <a:srgbClr val="8A6D1E"/>
                 </a:solidFill>
                 <a:latin typeface="Amiri" pitchFamily="2" charset="-78"/>
+                <a:ea typeface="Amiri" pitchFamily="2" charset="-78"/>
                 <a:cs typeface="Amiri" pitchFamily="2" charset="-78"/>
               </a:rPr>
               <a:t>سَتَتَعَلَّمُ اليَوْمَ</a:t>
@@ -57428,6 +57726,7 @@
                   <a:srgbClr val="D4AF37"/>
                 </a:solidFill>
                 <a:latin typeface="Amiri" pitchFamily="2" charset="-78"/>
+                <a:ea typeface="Amiri" pitchFamily="2" charset="-78"/>
                 <a:cs typeface="Amiri" pitchFamily="2" charset="-78"/>
               </a:rPr>
               <a:t>م</a:t>
@@ -57748,6 +58047,7 @@
                   <a:srgbClr val="8A6D1E"/>
                 </a:solidFill>
                 <a:latin typeface="Amiri" pitchFamily="2" charset="-78"/>
+                <a:ea typeface="Amiri" pitchFamily="2" charset="-78"/>
                 <a:cs typeface="Amiri" pitchFamily="2" charset="-78"/>
               </a:rPr>
               <a:t>مُصْطَلَحَاتُ الدَّرْسِ</a:t>
@@ -57986,6 +58286,7 @@
                   <a:srgbClr val="1B3B6F"/>
                 </a:solidFill>
                 <a:latin typeface="Amiri" pitchFamily="2" charset="-78"/>
+                <a:ea typeface="Amiri" pitchFamily="2" charset="-78"/>
                 <a:cs typeface="Amiri" pitchFamily="2" charset="-78"/>
               </a:rPr>
               <a:t>ظَرْفُ الزَّمَانِ</a:t>
@@ -58078,6 +58379,7 @@
                   <a:srgbClr val="8A6D1E"/>
                 </a:solidFill>
                 <a:latin typeface="Amiri" pitchFamily="2" charset="-78"/>
+                <a:ea typeface="Amiri" pitchFamily="2" charset="-78"/>
                 <a:cs typeface="Amiri" pitchFamily="2" charset="-78"/>
               </a:rPr>
               <a:t>غَدًا · الْيَوْمَ</a:t>
@@ -58278,6 +58580,7 @@
                   <a:srgbClr val="1B3B6F"/>
                 </a:solidFill>
                 <a:latin typeface="Amiri" pitchFamily="2" charset="-78"/>
+                <a:ea typeface="Amiri" pitchFamily="2" charset="-78"/>
                 <a:cs typeface="Amiri" pitchFamily="2" charset="-78"/>
               </a:rPr>
               <a:t>ظَرْفُ الْمَكَانِ</a:t>
@@ -58370,6 +58673,7 @@
                   <a:srgbClr val="8A6D1E"/>
                 </a:solidFill>
                 <a:latin typeface="Amiri" pitchFamily="2" charset="-78"/>
+                <a:ea typeface="Amiri" pitchFamily="2" charset="-78"/>
                 <a:cs typeface="Amiri" pitchFamily="2" charset="-78"/>
               </a:rPr>
               <a:t>هُنَا · فَوْقَ</a:t>
@@ -58570,6 +58874,7 @@
                   <a:srgbClr val="1B3B6F"/>
                 </a:solidFill>
                 <a:latin typeface="Amiri" pitchFamily="2" charset="-78"/>
+                <a:ea typeface="Amiri" pitchFamily="2" charset="-78"/>
                 <a:cs typeface="Amiri" pitchFamily="2" charset="-78"/>
               </a:rPr>
               <a:t>الْحَالُ</a:t>
@@ -58662,6 +58967,7 @@
                   <a:srgbClr val="8A6D1E"/>
                 </a:solidFill>
                 <a:latin typeface="Amiri" pitchFamily="2" charset="-78"/>
+                <a:ea typeface="Amiri" pitchFamily="2" charset="-78"/>
                 <a:cs typeface="Amiri" pitchFamily="2" charset="-78"/>
               </a:rPr>
               <a:t>جَيِّدًا · بِبُطْءٍ</a:t>
@@ -58862,6 +59168,7 @@
                   <a:srgbClr val="1B3B6F"/>
                 </a:solidFill>
                 <a:latin typeface="Amiri" pitchFamily="2" charset="-78"/>
+                <a:ea typeface="Amiri" pitchFamily="2" charset="-78"/>
                 <a:cs typeface="Amiri" pitchFamily="2" charset="-78"/>
               </a:rPr>
               <a:t>مَتَى؟</a:t>
@@ -58954,6 +59261,7 @@
                   <a:srgbClr val="8A6D1E"/>
                 </a:solidFill>
                 <a:latin typeface="Amiri" pitchFamily="2" charset="-78"/>
+                <a:ea typeface="Amiri" pitchFamily="2" charset="-78"/>
                 <a:cs typeface="Amiri" pitchFamily="2" charset="-78"/>
               </a:rPr>
               <a:t>مَتَى تَدْرُسُ؟</a:t>
@@ -59154,6 +59462,7 @@
                   <a:srgbClr val="1B3B6F"/>
                 </a:solidFill>
                 <a:latin typeface="Amiri" pitchFamily="2" charset="-78"/>
+                <a:ea typeface="Amiri" pitchFamily="2" charset="-78"/>
                 <a:cs typeface="Amiri" pitchFamily="2" charset="-78"/>
               </a:rPr>
               <a:t>أَيْنَ؟</a:t>
@@ -59246,6 +59555,7 @@
                   <a:srgbClr val="8A6D1E"/>
                 </a:solidFill>
                 <a:latin typeface="Amiri" pitchFamily="2" charset="-78"/>
+                <a:ea typeface="Amiri" pitchFamily="2" charset="-78"/>
                 <a:cs typeface="Amiri" pitchFamily="2" charset="-78"/>
               </a:rPr>
               <a:t>أَيْنَ الْكِتَابُ؟</a:t>
@@ -59446,6 +59756,7 @@
                   <a:srgbClr val="1B3B6F"/>
                 </a:solidFill>
                 <a:latin typeface="Amiri" pitchFamily="2" charset="-78"/>
+                <a:ea typeface="Amiri" pitchFamily="2" charset="-78"/>
                 <a:cs typeface="Amiri" pitchFamily="2" charset="-78"/>
               </a:rPr>
               <a:t>كَيْفَ؟</a:t>
@@ -59538,6 +59849,7 @@
                   <a:srgbClr val="8A6D1E"/>
                 </a:solidFill>
                 <a:latin typeface="Amiri" pitchFamily="2" charset="-78"/>
+                <a:ea typeface="Amiri" pitchFamily="2" charset="-78"/>
                 <a:cs typeface="Amiri" pitchFamily="2" charset="-78"/>
               </a:rPr>
               <a:t>كَيْفَ تَكْتُبُ؟</a:t>
@@ -59671,6 +59983,7 @@
                   <a:srgbClr val="D4AF37"/>
                 </a:solidFill>
                 <a:latin typeface="Amiri" pitchFamily="2" charset="-78"/>
+                <a:ea typeface="Amiri" pitchFamily="2" charset="-78"/>
                 <a:cs typeface="Amiri" pitchFamily="2" charset="-78"/>
               </a:rPr>
               <a:t>م</a:t>
@@ -59991,6 +60304,7 @@
                   <a:srgbClr val="8A6D1E"/>
                 </a:solidFill>
                 <a:latin typeface="Amiri" pitchFamily="2" charset="-78"/>
+                <a:ea typeface="Amiri" pitchFamily="2" charset="-78"/>
                 <a:cs typeface="Amiri" pitchFamily="2" charset="-78"/>
               </a:rPr>
               <a:t>ظُرُوفُ الزَّمَانِ</a:t>
@@ -60233,6 +60547,7 @@
                   <a:srgbClr val="1B3B6F"/>
                 </a:solidFill>
                 <a:latin typeface="Amiri" pitchFamily="2" charset="-78"/>
+                <a:ea typeface="Amiri" pitchFamily="2" charset="-78"/>
                 <a:cs typeface="Amiri" pitchFamily="2" charset="-78"/>
               </a:rPr>
               <a:t>أَدْرُسُ الْعَرَبِيَّةَ الْيَوْمَ.</a:t>
@@ -60309,6 +60624,7 @@
                   <a:srgbClr val="1B3B6F"/>
                 </a:solidFill>
                 <a:latin typeface="Amiri" pitchFamily="2" charset="-78"/>
+                <a:ea typeface="Amiri" pitchFamily="2" charset="-78"/>
                 <a:cs typeface="Amiri" pitchFamily="2" charset="-78"/>
               </a:rPr>
               <a:t>الْيَوْمَ</a:t>
@@ -60439,6 +60755,7 @@
                   <a:srgbClr val="1B3B6F"/>
                 </a:solidFill>
                 <a:latin typeface="Amiri" pitchFamily="2" charset="-78"/>
+                <a:ea typeface="Amiri" pitchFamily="2" charset="-78"/>
                 <a:cs typeface="Amiri" pitchFamily="2" charset="-78"/>
               </a:rPr>
               <a:t>زُرْتُ صَدِيقِي أَمْسِ.</a:t>
@@ -60515,6 +60832,7 @@
                   <a:srgbClr val="1B3B6F"/>
                 </a:solidFill>
                 <a:latin typeface="Amiri" pitchFamily="2" charset="-78"/>
+                <a:ea typeface="Amiri" pitchFamily="2" charset="-78"/>
                 <a:cs typeface="Amiri" pitchFamily="2" charset="-78"/>
               </a:rPr>
               <a:t>أَمْسِ</a:t>
@@ -60645,6 +60963,7 @@
                   <a:srgbClr val="1B3B6F"/>
                 </a:solidFill>
                 <a:latin typeface="Amiri" pitchFamily="2" charset="-78"/>
+                <a:ea typeface="Amiri" pitchFamily="2" charset="-78"/>
                 <a:cs typeface="Amiri" pitchFamily="2" charset="-78"/>
               </a:rPr>
               <a:t>سَأَعْمَلُ غَدًا.</a:t>
@@ -60721,6 +61040,7 @@
                   <a:srgbClr val="1B3B6F"/>
                 </a:solidFill>
                 <a:latin typeface="Amiri" pitchFamily="2" charset="-78"/>
+                <a:ea typeface="Amiri" pitchFamily="2" charset="-78"/>
                 <a:cs typeface="Amiri" pitchFamily="2" charset="-78"/>
               </a:rPr>
               <a:t>غَدًا</a:t>
@@ -60851,6 +61171,7 @@
                   <a:srgbClr val="1B3B6F"/>
                 </a:solidFill>
                 <a:latin typeface="Amiri" pitchFamily="2" charset="-78"/>
+                <a:ea typeface="Amiri" pitchFamily="2" charset="-78"/>
                 <a:cs typeface="Amiri" pitchFamily="2" charset="-78"/>
               </a:rPr>
               <a:t>أَقْرَأُ الآنَ.</a:t>
@@ -60927,6 +61248,7 @@
                   <a:srgbClr val="1B3B6F"/>
                 </a:solidFill>
                 <a:latin typeface="Amiri" pitchFamily="2" charset="-78"/>
+                <a:ea typeface="Amiri" pitchFamily="2" charset="-78"/>
                 <a:cs typeface="Amiri" pitchFamily="2" charset="-78"/>
               </a:rPr>
               <a:t>الآنَ</a:t>
@@ -61057,6 +61379,7 @@
                   <a:srgbClr val="1B3B6F"/>
                 </a:solidFill>
                 <a:latin typeface="Amiri" pitchFamily="2" charset="-78"/>
+                <a:ea typeface="Amiri" pitchFamily="2" charset="-78"/>
                 <a:cs typeface="Amiri" pitchFamily="2" charset="-78"/>
               </a:rPr>
               <a:t>سَنَبْدَأُ قَرِيبًا.</a:t>
@@ -61133,6 +61456,7 @@
                   <a:srgbClr val="1B3B6F"/>
                 </a:solidFill>
                 <a:latin typeface="Amiri" pitchFamily="2" charset="-78"/>
+                <a:ea typeface="Amiri" pitchFamily="2" charset="-78"/>
                 <a:cs typeface="Amiri" pitchFamily="2" charset="-78"/>
               </a:rPr>
               <a:t>قَرِيبًا</a:t>
@@ -61198,6 +61522,7 @@
                   <a:srgbClr val="1B3B6F"/>
                 </a:solidFill>
                 <a:latin typeface="Amiri" pitchFamily="2" charset="-78"/>
+                <a:ea typeface="Amiri" pitchFamily="2" charset="-78"/>
                 <a:cs typeface="Amiri" pitchFamily="2" charset="-78"/>
               </a:rPr>
               <a:t>أُصَلِّي دَائِمًا فِي الْمَسْجِدِ.</a:t>
@@ -61274,6 +61599,7 @@
                   <a:srgbClr val="1B3B6F"/>
                 </a:solidFill>
                 <a:latin typeface="Amiri" pitchFamily="2" charset="-78"/>
+                <a:ea typeface="Amiri" pitchFamily="2" charset="-78"/>
                 <a:cs typeface="Amiri" pitchFamily="2" charset="-78"/>
               </a:rPr>
               <a:t>دَائِمًا · غَالِبًا · أَحْيَانًا · نَادِرًا</a:t>
@@ -61445,6 +61771,7 @@
                   <a:srgbClr val="D4AF37"/>
                 </a:solidFill>
                 <a:latin typeface="Amiri" pitchFamily="2" charset="-78"/>
+                <a:ea typeface="Amiri" pitchFamily="2" charset="-78"/>
                 <a:cs typeface="Amiri" pitchFamily="2" charset="-78"/>
               </a:rPr>
               <a:t>م</a:t>
@@ -61765,6 +62092,7 @@
                   <a:srgbClr val="8A6D1E"/>
                 </a:solidFill>
                 <a:latin typeface="Amiri" pitchFamily="2" charset="-78"/>
+                <a:ea typeface="Amiri" pitchFamily="2" charset="-78"/>
                 <a:cs typeface="Amiri" pitchFamily="2" charset="-78"/>
               </a:rPr>
               <a:t>ظُرُوفُ الْمَكَانِ</a:t>
@@ -62490,6 +62818,7 @@
                   <a:srgbClr val="1B3B6F"/>
                 </a:solidFill>
                 <a:latin typeface="Amiri" pitchFamily="2" charset="-78"/>
+                <a:ea typeface="Amiri" pitchFamily="2" charset="-78"/>
                 <a:cs typeface="Amiri" pitchFamily="2" charset="-78"/>
               </a:rPr>
               <a:t>أَسْكُنُ هُنَا، وَلَكِنَّ مَدْرَسَتِي هُنَاكَ.</a:t>
@@ -62589,6 +62918,7 @@
                   <a:srgbClr val="1B3B6F"/>
                 </a:solidFill>
                 <a:latin typeface="Amiri" pitchFamily="2" charset="-78"/>
+                <a:ea typeface="Amiri" pitchFamily="2" charset="-78"/>
                 <a:cs typeface="Amiri" pitchFamily="2" charset="-78"/>
               </a:rPr>
               <a:t>فَوْقَ الطَّاوِلَةِ · تَحْتَ الْكُرْسِيِّ</a:t>
@@ -62688,6 +63018,7 @@
                   <a:srgbClr val="1B3B6F"/>
                 </a:solidFill>
                 <a:latin typeface="Amiri" pitchFamily="2" charset="-78"/>
+                <a:ea typeface="Amiri" pitchFamily="2" charset="-78"/>
                 <a:cs typeface="Amiri" pitchFamily="2" charset="-78"/>
               </a:rPr>
               <a:t>أَمَامَ الْمَدْرَسَةِ · خَلْفَ الْبَيْتِ</a:t>
@@ -62787,6 +63118,7 @@
                   <a:srgbClr val="1B3B6F"/>
                 </a:solidFill>
                 <a:latin typeface="Amiri" pitchFamily="2" charset="-78"/>
+                <a:ea typeface="Amiri" pitchFamily="2" charset="-78"/>
                 <a:cs typeface="Amiri" pitchFamily="2" charset="-78"/>
               </a:rPr>
               <a:t>بَيْنَ الْمَكْتَبَيْنِ</a:t>
@@ -62923,13 +63255,9 @@
     <a:fontScheme name="Office">
       <a:majorFont>
         <a:latin typeface="Calibri Light" panose="020F0302020204030204"/>
-        <a:ea typeface=""/>
-        <a:cs typeface=""/>
-        <a:font script="Jpan" typeface="游ゴシック Light"/>
-        <a:font script="Hang" typeface="맑은 고딕"/>
-        <a:font script="Hans" typeface="等线 Light"/>
-        <a:font script="Hant" typeface="新細明體"/>
-        <a:font script="Arab" typeface="Times New Roman"/>
+        <a:ea typeface="Amiri" pitchFamily="2" charset="-78"/>
+        <a:cs typeface="Amiri" pitchFamily="2" charset="-78"/>
+        <a:font script="Arab" typeface="Amiri"/>
         <a:font script="Hebr" typeface="Times New Roman"/>
         <a:font script="Thai" typeface="Angsana New"/>
         <a:font script="Ethi" typeface="Nyala"/>
@@ -62975,13 +63303,9 @@
       </a:majorFont>
       <a:minorFont>
         <a:latin typeface="Calibri" panose="020F0502020204030204"/>
-        <a:ea typeface=""/>
-        <a:cs typeface=""/>
-        <a:font script="Jpan" typeface="游ゴシック"/>
-        <a:font script="Hang" typeface="맑은 고딕"/>
-        <a:font script="Hans" typeface="等线"/>
-        <a:font script="Hant" typeface="新細明體"/>
-        <a:font script="Arab" typeface="Arial"/>
+        <a:ea typeface="Amiri" pitchFamily="2" charset="-78"/>
+        <a:cs typeface="Amiri" pitchFamily="2" charset="-78"/>
+        <a:font script="Arab" typeface="Amiri"/>
         <a:font script="Hebr" typeface="Arial"/>
         <a:font script="Thai" typeface="Cordia New"/>
         <a:font script="Ethi" typeface="Nyala"/>

--- a/Grammar_Mastery/05_Adverbs/GM-ADV-01_Adverbs_of_Time_Place_Manner.pptx
+++ b/Grammar_Mastery/05_Adverbs/GM-ADV-01_Adverbs_of_Time_Place_Manner.pptx
@@ -48651,7 +48651,7 @@
                 <a:solidFill>
                   <a:srgbClr val="5A6472"/>
                 </a:solidFill>
-                <a:latin typeface="Calibri" pitchFamily="34" charset="0"/>
+                <a:latin typeface="Amiri" pitchFamily="2" charset="-78"/>
                 <a:ea typeface="Amiri" pitchFamily="2" charset="-78"/>
                 <a:cs typeface="Amiri" pitchFamily="2" charset="-78"/>
               </a:rPr>
